--- a/deck/proposta-pepsico-petrolina.pptx
+++ b/deck/proposta-pepsico-petrolina.pptx
@@ -2130,12 +2130,12 @@
         </p:nvSpPr>
         <p:spPr>
           <a:xfrm>
-            <a:off x="658368" y="3163824"/>
-            <a:ext cx="3401568" cy="1225296"/>
+            <a:off x="658368" y="3054096"/>
+            <a:ext cx="3401568" cy="1645920"/>
           </a:xfrm>
           <a:prstGeom prst="roundRect">
             <a:avLst>
-              <a:gd name="adj" fmla="val 4478"/>
+              <a:gd name="adj" fmla="val 3333"/>
             </a:avLst>
           </a:prstGeom>
           <a:solidFill>
@@ -2157,7 +2157,7 @@
         </p:nvSpPr>
         <p:spPr>
           <a:xfrm>
-            <a:off x="859536" y="3328416"/>
+            <a:off x="859536" y="3218688"/>
             <a:ext cx="548640" cy="548640"/>
           </a:xfrm>
           <a:prstGeom prst="ellipse">
@@ -2190,7 +2190,7 @@
         </p:blipFill>
         <p:spPr>
           <a:xfrm>
-            <a:off x="982980" y="3451860"/>
+            <a:off x="982980" y="3342132"/>
             <a:ext cx="301752" cy="301752"/>
           </a:xfrm>
           <a:prstGeom prst="rect">
@@ -2206,8 +2206,8 @@
         </p:nvSpPr>
         <p:spPr>
           <a:xfrm>
-            <a:off x="1591056" y="3511296"/>
-            <a:ext cx="457200" cy="201168"/>
+            <a:off x="1591056" y="3383280"/>
+            <a:ext cx="457200" cy="237744"/>
           </a:xfrm>
           <a:prstGeom prst="rect">
             <a:avLst/>
@@ -2245,7 +2245,7 @@
         </p:nvSpPr>
         <p:spPr>
           <a:xfrm>
-            <a:off x="914400" y="3950208"/>
+            <a:off x="914400" y="3840480"/>
             <a:ext cx="2889504" cy="274320"/>
           </a:xfrm>
           <a:prstGeom prst="rect">
@@ -2284,8 +2284,8 @@
         </p:nvSpPr>
         <p:spPr>
           <a:xfrm>
-            <a:off x="914400" y="4279392"/>
-            <a:ext cx="2889504" cy="201168"/>
+            <a:off x="914400" y="4151376"/>
+            <a:ext cx="2889504" cy="237744"/>
           </a:xfrm>
           <a:prstGeom prst="rect">
             <a:avLst/>
@@ -2301,7 +2301,46 @@
               <a:buNone/>
             </a:pPr>
             <a:r>
-              <a:rPr lang="en-US" sz="950" dirty="0">
+              <a:rPr lang="en-US" sz="1200" dirty="0">
+                <a:solidFill>
+                  <a:srgbClr val="8FB04E"/>
+                </a:solidFill>
+                <a:latin typeface="Arial" pitchFamily="34" charset="0"/>
+                <a:ea typeface="Arial" pitchFamily="34" charset="-122"/>
+                <a:cs typeface="Arial" pitchFamily="34" charset="-120"/>
+              </a:rPr>
+              <a:t>(resíduo)</a:t>
+            </a:r>
+            <a:endParaRPr lang="en-US" sz="1200" dirty="0"/>
+          </a:p>
+        </p:txBody>
+      </p:sp>
+      <p:sp>
+        <p:nvSpPr>
+          <p:cNvPr id="13" name="Text 10"/>
+          <p:cNvSpPr txBox="1"/>
+          <p:nvPr/>
+        </p:nvSpPr>
+        <p:spPr>
+          <a:xfrm>
+            <a:off x="914400" y="4389120"/>
+            <a:ext cx="2889504" cy="237744"/>
+          </a:xfrm>
+          <a:prstGeom prst="rect">
+            <a:avLst/>
+          </a:prstGeom>
+          <a:noFill/>
+          <a:ln/>
+        </p:spPr>
+        <p:txBody>
+          <a:bodyPr wrap="square" lIns="0" tIns="0" rIns="0" bIns="0" rtlCol="0" anchor="ctr"/>
+          <a:lstStyle/>
+          <a:p>
+            <a:pPr algn="l" indent="0" marL="0">
+              <a:buNone/>
+            </a:pPr>
+            <a:r>
+              <a:rPr lang="en-US" sz="1100" dirty="0">
                 <a:solidFill>
                   <a:srgbClr val="AEB7B9"/>
                 </a:solidFill>
@@ -2311,24 +2350,24 @@
               </a:rPr>
               <a:t>matéria-prima local</a:t>
             </a:r>
-            <a:endParaRPr lang="en-US" sz="950" dirty="0"/>
-          </a:p>
-        </p:txBody>
-      </p:sp>
-      <p:sp>
-        <p:nvSpPr>
-          <p:cNvPr id="13" name="Shape 10"/>
+            <a:endParaRPr lang="en-US" sz="1100" dirty="0"/>
+          </a:p>
+        </p:txBody>
+      </p:sp>
+      <p:sp>
+        <p:nvSpPr>
+          <p:cNvPr id="14" name="Shape 11"/>
           <p:cNvSpPr/>
           <p:nvPr/>
         </p:nvSpPr>
         <p:spPr>
           <a:xfrm>
-            <a:off x="4370832" y="3163824"/>
-            <a:ext cx="3401568" cy="1225296"/>
+            <a:off x="4370832" y="3054096"/>
+            <a:ext cx="3401568" cy="1645920"/>
           </a:xfrm>
           <a:prstGeom prst="roundRect">
             <a:avLst>
-              <a:gd name="adj" fmla="val 4478"/>
+              <a:gd name="adj" fmla="val 3333"/>
             </a:avLst>
           </a:prstGeom>
           <a:solidFill>
@@ -2344,13 +2383,13 @@
       </p:sp>
       <p:sp>
         <p:nvSpPr>
-          <p:cNvPr id="14" name="Shape 11"/>
+          <p:cNvPr id="15" name="Shape 12"/>
           <p:cNvSpPr/>
           <p:nvPr/>
         </p:nvSpPr>
         <p:spPr>
           <a:xfrm>
-            <a:off x="4572000" y="3328416"/>
+            <a:off x="4572000" y="3218688"/>
             <a:ext cx="548640" cy="548640"/>
           </a:xfrm>
           <a:prstGeom prst="ellipse">
@@ -2369,7 +2408,7 @@
       </p:sp>
       <p:pic>
         <p:nvPicPr>
-          <p:cNvPr id="15" name="Image 1" descr="/home/user/clipping/design-system/.preview/deck-assets/ico/reator-acid.png">    </p:cNvPr>
+          <p:cNvPr id="16" name="Image 1" descr="/home/user/clipping/design-system/.preview/deck-assets/ico/reator-acid.png">    </p:cNvPr>
           <p:cNvPicPr>
             <a:picLocks noChangeAspect="1"/>
           </p:cNvPicPr>
@@ -2383,7 +2422,7 @@
         </p:blipFill>
         <p:spPr>
           <a:xfrm>
-            <a:off x="4695444" y="3451860"/>
+            <a:off x="4695444" y="3342132"/>
             <a:ext cx="301752" cy="301752"/>
           </a:xfrm>
           <a:prstGeom prst="rect">
@@ -2393,14 +2432,14 @@
       </p:pic>
       <p:sp>
         <p:nvSpPr>
-          <p:cNvPr id="16" name="Text 12"/>
-          <p:cNvSpPr txBox="1"/>
-          <p:nvPr/>
-        </p:nvSpPr>
-        <p:spPr>
-          <a:xfrm>
-            <a:off x="5303520" y="3511296"/>
-            <a:ext cx="457200" cy="201168"/>
+          <p:cNvPr id="17" name="Text 13"/>
+          <p:cNvSpPr txBox="1"/>
+          <p:nvPr/>
+        </p:nvSpPr>
+        <p:spPr>
+          <a:xfrm>
+            <a:off x="5303520" y="3383280"/>
+            <a:ext cx="457200" cy="237744"/>
           </a:xfrm>
           <a:prstGeom prst="rect">
             <a:avLst/>
@@ -2432,13 +2471,13 @@
       </p:sp>
       <p:sp>
         <p:nvSpPr>
-          <p:cNvPr id="17" name="Text 13"/>
-          <p:cNvSpPr txBox="1"/>
-          <p:nvPr/>
-        </p:nvSpPr>
-        <p:spPr>
-          <a:xfrm>
-            <a:off x="4626864" y="3950208"/>
+          <p:cNvPr id="18" name="Text 14"/>
+          <p:cNvSpPr txBox="1"/>
+          <p:nvPr/>
+        </p:nvSpPr>
+        <p:spPr>
+          <a:xfrm>
+            <a:off x="4626864" y="3840480"/>
             <a:ext cx="2889504" cy="274320"/>
           </a:xfrm>
           <a:prstGeom prst="rect">
@@ -2471,14 +2510,14 @@
       </p:sp>
       <p:sp>
         <p:nvSpPr>
-          <p:cNvPr id="18" name="Text 14"/>
-          <p:cNvSpPr txBox="1"/>
-          <p:nvPr/>
-        </p:nvSpPr>
-        <p:spPr>
-          <a:xfrm>
-            <a:off x="4626864" y="4279392"/>
-            <a:ext cx="2889504" cy="201168"/>
+          <p:cNvPr id="19" name="Text 15"/>
+          <p:cNvSpPr txBox="1"/>
+          <p:nvPr/>
+        </p:nvSpPr>
+        <p:spPr>
+          <a:xfrm>
+            <a:off x="4626864" y="4151376"/>
+            <a:ext cx="2889504" cy="237744"/>
           </a:xfrm>
           <a:prstGeom prst="rect">
             <a:avLst/>
@@ -2494,7 +2533,46 @@
               <a:buNone/>
             </a:pPr>
             <a:r>
-              <a:rPr lang="en-US" sz="950" dirty="0">
+              <a:rPr lang="en-US" sz="1200" dirty="0">
+                <a:solidFill>
+                  <a:srgbClr val="8FB04E"/>
+                </a:solidFill>
+                <a:latin typeface="Arial" pitchFamily="34" charset="0"/>
+                <a:ea typeface="Arial" pitchFamily="34" charset="-122"/>
+                <a:cs typeface="Arial" pitchFamily="34" charset="-120"/>
+              </a:rPr>
+              <a:t>(autossustentada)</a:t>
+            </a:r>
+            <a:endParaRPr lang="en-US" sz="1200" dirty="0"/>
+          </a:p>
+        </p:txBody>
+      </p:sp>
+      <p:sp>
+        <p:nvSpPr>
+          <p:cNvPr id="20" name="Text 16"/>
+          <p:cNvSpPr txBox="1"/>
+          <p:nvPr/>
+        </p:nvSpPr>
+        <p:spPr>
+          <a:xfrm>
+            <a:off x="4626864" y="4389120"/>
+            <a:ext cx="2889504" cy="237744"/>
+          </a:xfrm>
+          <a:prstGeom prst="rect">
+            <a:avLst/>
+          </a:prstGeom>
+          <a:noFill/>
+          <a:ln/>
+        </p:spPr>
+        <p:txBody>
+          <a:bodyPr wrap="square" lIns="0" tIns="0" rIns="0" bIns="0" rtlCol="0" anchor="ctr"/>
+          <a:lstStyle/>
+          <a:p>
+            <a:pPr algn="l" indent="0" marL="0">
+              <a:buNone/>
+            </a:pPr>
+            <a:r>
+              <a:rPr lang="en-US" sz="1100" dirty="0">
                 <a:solidFill>
                   <a:srgbClr val="AEB7B9"/>
                 </a:solidFill>
@@ -2504,24 +2582,24 @@
               </a:rPr>
               <a:t>calor + oxigênio limitado</a:t>
             </a:r>
-            <a:endParaRPr lang="en-US" sz="950" dirty="0"/>
-          </a:p>
-        </p:txBody>
-      </p:sp>
-      <p:sp>
-        <p:nvSpPr>
-          <p:cNvPr id="19" name="Shape 15"/>
+            <a:endParaRPr lang="en-US" sz="1100" dirty="0"/>
+          </a:p>
+        </p:txBody>
+      </p:sp>
+      <p:sp>
+        <p:nvSpPr>
+          <p:cNvPr id="21" name="Shape 17"/>
           <p:cNvSpPr/>
           <p:nvPr/>
         </p:nvSpPr>
         <p:spPr>
           <a:xfrm>
-            <a:off x="8083296" y="3163824"/>
-            <a:ext cx="3401568" cy="1225296"/>
+            <a:off x="8083296" y="3054096"/>
+            <a:ext cx="3401568" cy="1645920"/>
           </a:xfrm>
           <a:prstGeom prst="roundRect">
             <a:avLst>
-              <a:gd name="adj" fmla="val 4478"/>
+              <a:gd name="adj" fmla="val 3333"/>
             </a:avLst>
           </a:prstGeom>
           <a:solidFill>
@@ -2537,13 +2615,13 @@
       </p:sp>
       <p:sp>
         <p:nvSpPr>
-          <p:cNvPr id="20" name="Shape 16"/>
+          <p:cNvPr id="22" name="Shape 18"/>
           <p:cNvSpPr/>
           <p:nvPr/>
         </p:nvSpPr>
         <p:spPr>
           <a:xfrm>
-            <a:off x="8284464" y="3328416"/>
+            <a:off x="8284464" y="3218688"/>
             <a:ext cx="548640" cy="548640"/>
           </a:xfrm>
           <a:prstGeom prst="ellipse">
@@ -2562,7 +2640,7 @@
       </p:sp>
       <p:pic>
         <p:nvPicPr>
-          <p:cNvPr id="21" name="Image 2" descr="/home/user/clipping/design-system/.preview/deck-assets/ico/char-dark.png">    </p:cNvPr>
+          <p:cNvPr id="23" name="Image 2" descr="/home/user/clipping/design-system/.preview/deck-assets/ico/char-dark.png">    </p:cNvPr>
           <p:cNvPicPr>
             <a:picLocks noChangeAspect="1"/>
           </p:cNvPicPr>
@@ -2576,7 +2654,7 @@
         </p:blipFill>
         <p:spPr>
           <a:xfrm>
-            <a:off x="8407908" y="3451860"/>
+            <a:off x="8407908" y="3342132"/>
             <a:ext cx="301752" cy="301752"/>
           </a:xfrm>
           <a:prstGeom prst="rect">
@@ -2586,14 +2664,14 @@
       </p:pic>
       <p:sp>
         <p:nvSpPr>
-          <p:cNvPr id="22" name="Text 17"/>
-          <p:cNvSpPr txBox="1"/>
-          <p:nvPr/>
-        </p:nvSpPr>
-        <p:spPr>
-          <a:xfrm>
-            <a:off x="9015984" y="3511296"/>
-            <a:ext cx="457200" cy="201168"/>
+          <p:cNvPr id="24" name="Text 19"/>
+          <p:cNvSpPr txBox="1"/>
+          <p:nvPr/>
+        </p:nvSpPr>
+        <p:spPr>
+          <a:xfrm>
+            <a:off x="9015984" y="3383280"/>
+            <a:ext cx="457200" cy="237744"/>
           </a:xfrm>
           <a:prstGeom prst="rect">
             <a:avLst/>
@@ -2625,13 +2703,13 @@
       </p:sp>
       <p:sp>
         <p:nvSpPr>
-          <p:cNvPr id="23" name="Text 18"/>
-          <p:cNvSpPr txBox="1"/>
-          <p:nvPr/>
-        </p:nvSpPr>
-        <p:spPr>
-          <a:xfrm>
-            <a:off x="8339328" y="3950208"/>
+          <p:cNvPr id="25" name="Text 20"/>
+          <p:cNvSpPr txBox="1"/>
+          <p:nvPr/>
+        </p:nvSpPr>
+        <p:spPr>
+          <a:xfrm>
+            <a:off x="8339328" y="3840480"/>
             <a:ext cx="2889504" cy="274320"/>
           </a:xfrm>
           <a:prstGeom prst="rect">
@@ -2664,14 +2742,14 @@
       </p:sp>
       <p:sp>
         <p:nvSpPr>
-          <p:cNvPr id="24" name="Text 19"/>
-          <p:cNvSpPr txBox="1"/>
-          <p:nvPr/>
-        </p:nvSpPr>
-        <p:spPr>
-          <a:xfrm>
-            <a:off x="8339328" y="4279392"/>
-            <a:ext cx="2889504" cy="201168"/>
+          <p:cNvPr id="26" name="Text 21"/>
+          <p:cNvSpPr txBox="1"/>
+          <p:nvPr/>
+        </p:nvSpPr>
+        <p:spPr>
+          <a:xfrm>
+            <a:off x="8339328" y="4151376"/>
+            <a:ext cx="2889504" cy="237744"/>
           </a:xfrm>
           <a:prstGeom prst="rect">
             <a:avLst/>
@@ -2687,7 +2765,46 @@
               <a:buNone/>
             </a:pPr>
             <a:r>
-              <a:rPr lang="en-US" sz="950" dirty="0">
+              <a:rPr lang="en-US" sz="1200" dirty="0">
+                <a:solidFill>
+                  <a:srgbClr val="8FB04E"/>
+                </a:solidFill>
+                <a:latin typeface="Arial" pitchFamily="34" charset="0"/>
+                <a:ea typeface="Arial" pitchFamily="34" charset="-122"/>
+                <a:cs typeface="Arial" pitchFamily="34" charset="-120"/>
+              </a:rPr>
+              <a:t>(gera crédito)</a:t>
+            </a:r>
+            <a:endParaRPr lang="en-US" sz="1200" dirty="0"/>
+          </a:p>
+        </p:txBody>
+      </p:sp>
+      <p:sp>
+        <p:nvSpPr>
+          <p:cNvPr id="27" name="Text 22"/>
+          <p:cNvSpPr txBox="1"/>
+          <p:nvPr/>
+        </p:nvSpPr>
+        <p:spPr>
+          <a:xfrm>
+            <a:off x="8339328" y="4389120"/>
+            <a:ext cx="2889504" cy="237744"/>
+          </a:xfrm>
+          <a:prstGeom prst="rect">
+            <a:avLst/>
+          </a:prstGeom>
+          <a:noFill/>
+          <a:ln/>
+        </p:spPr>
+        <p:txBody>
+          <a:bodyPr wrap="square" lIns="0" tIns="0" rIns="0" bIns="0" rtlCol="0" anchor="ctr"/>
+          <a:lstStyle/>
+          <a:p>
+            <a:pPr algn="l" indent="0" marL="0">
+              <a:buNone/>
+            </a:pPr>
+            <a:r>
+              <a:rPr lang="en-US" sz="1100" dirty="0">
                 <a:solidFill>
                   <a:srgbClr val="AEB7B9"/>
                 </a:solidFill>
@@ -2697,19 +2814,19 @@
               </a:rPr>
               <a:t>produto rico em carbono</a:t>
             </a:r>
-            <a:endParaRPr lang="en-US" sz="950" dirty="0"/>
-          </a:p>
-        </p:txBody>
-      </p:sp>
-      <p:sp>
-        <p:nvSpPr>
-          <p:cNvPr id="25" name="Shape 20"/>
+            <a:endParaRPr lang="en-US" sz="1100" dirty="0"/>
+          </a:p>
+        </p:txBody>
+      </p:sp>
+      <p:sp>
+        <p:nvSpPr>
+          <p:cNvPr id="28" name="Shape 23"/>
           <p:cNvSpPr/>
           <p:nvPr/>
         </p:nvSpPr>
         <p:spPr>
           <a:xfrm>
-            <a:off x="2395728" y="4700016"/>
+            <a:off x="2395728" y="5010912"/>
             <a:ext cx="7680960" cy="10058"/>
           </a:xfrm>
           <a:prstGeom prst="rect">
@@ -2725,7 +2842,7 @@
       </p:sp>
       <p:pic>
         <p:nvPicPr>
-          <p:cNvPr id="26" name="Image 3" descr="/home/user/clipping/design-system/.preview/deck-assets/ico/gases-acid.png">    </p:cNvPr>
+          <p:cNvPr id="29" name="Image 3" descr="/home/user/clipping/design-system/.preview/deck-assets/ico/gases-acid.png">    </p:cNvPr>
           <p:cNvPicPr>
             <a:picLocks noChangeAspect="1"/>
           </p:cNvPicPr>
@@ -2739,7 +2856,7 @@
         </p:blipFill>
         <p:spPr>
           <a:xfrm>
-            <a:off x="5870448" y="4791456"/>
+            <a:off x="5870448" y="5102352"/>
             <a:ext cx="274320" cy="274320"/>
           </a:xfrm>
           <a:prstGeom prst="rect">
@@ -2749,13 +2866,13 @@
       </p:pic>
       <p:sp>
         <p:nvSpPr>
-          <p:cNvPr id="27" name="Text 21"/>
-          <p:cNvSpPr txBox="1"/>
-          <p:nvPr/>
-        </p:nvSpPr>
-        <p:spPr>
-          <a:xfrm>
-            <a:off x="2395728" y="5175504"/>
+          <p:cNvPr id="30" name="Text 24"/>
+          <p:cNvSpPr txBox="1"/>
+          <p:nvPr/>
+        </p:nvSpPr>
+        <p:spPr>
+          <a:xfrm>
+            <a:off x="2395728" y="5504688"/>
             <a:ext cx="7680960" cy="182880"/>
           </a:xfrm>
           <a:prstGeom prst="rect">
@@ -2772,7 +2889,7 @@
               <a:buNone/>
             </a:pPr>
             <a:r>
-              <a:rPr lang="en-US" sz="850" spc="180" kern="0" dirty="0">
+              <a:rPr lang="en-US" sz="900" spc="180" kern="0" dirty="0">
                 <a:solidFill>
                   <a:srgbClr val="8FB04E"/>
                 </a:solidFill>
@@ -2782,13 +2899,13 @@
               </a:rPr>
               <a:t>GASES DO PROCESSO  →  CALOR / ENERGIA RECUPERÁVEL</a:t>
             </a:r>
-            <a:endParaRPr lang="en-US" sz="850" dirty="0"/>
+            <a:endParaRPr lang="en-US" sz="900" dirty="0"/>
           </a:p>
         </p:txBody>
       </p:sp>
       <p:pic>
         <p:nvPicPr>
-          <p:cNvPr id="28" name="Image 4" descr="/home/user/clipping/design-system/.preview/deck-assets/ico/bloco-acid.png">    </p:cNvPr>
+          <p:cNvPr id="31" name="Image 4" descr="/home/user/clipping/design-system/.preview/deck-assets/ico/bloco-acid.png">    </p:cNvPr>
           <p:cNvPicPr>
             <a:picLocks noChangeAspect="1"/>
           </p:cNvPicPr>
@@ -2802,8 +2919,8 @@
         </p:blipFill>
         <p:spPr>
           <a:xfrm>
-            <a:off x="658368" y="5797296"/>
-            <a:ext cx="256032" cy="256032"/>
+            <a:off x="658368" y="6016752"/>
+            <a:ext cx="274320" cy="274320"/>
           </a:xfrm>
           <a:prstGeom prst="rect">
             <a:avLst/>
@@ -2812,13 +2929,13 @@
       </p:pic>
       <p:sp>
         <p:nvSpPr>
-          <p:cNvPr id="29" name="Text 22"/>
-          <p:cNvSpPr txBox="1"/>
-          <p:nvPr/>
-        </p:nvSpPr>
-        <p:spPr>
-          <a:xfrm>
-            <a:off x="1024128" y="5870448"/>
+          <p:cNvPr id="32" name="Text 25"/>
+          <p:cNvSpPr txBox="1"/>
+          <p:nvPr/>
+        </p:nvSpPr>
+        <p:spPr>
+          <a:xfrm>
+            <a:off x="1042416" y="6099048"/>
             <a:ext cx="2194560" cy="182880"/>
           </a:xfrm>
           <a:prstGeom prst="rect">
@@ -2835,7 +2952,7 @@
               <a:buNone/>
             </a:pPr>
             <a:r>
-              <a:rPr lang="en-US" sz="850" spc="180" kern="0" dirty="0">
+              <a:rPr lang="en-US" sz="900" spc="180" kern="0" dirty="0">
                 <a:solidFill>
                   <a:srgbClr val="F2EEE3"/>
                 </a:solidFill>
@@ -2845,13 +2962,13 @@
               </a:rPr>
               <a:t>PRODUTO FÍSICO</a:t>
             </a:r>
-            <a:endParaRPr lang="en-US" sz="850" dirty="0"/>
+            <a:endParaRPr lang="en-US" sz="900" dirty="0"/>
           </a:p>
         </p:txBody>
       </p:sp>
       <p:pic>
         <p:nvPicPr>
-          <p:cNvPr id="30" name="Image 5" descr="/home/user/clipping/design-system/.preview/deck-assets/ico/calor-acid.png">    </p:cNvPr>
+          <p:cNvPr id="33" name="Image 5" descr="/home/user/clipping/design-system/.preview/deck-assets/ico/calor-acid.png">    </p:cNvPr>
           <p:cNvPicPr>
             <a:picLocks noChangeAspect="1"/>
           </p:cNvPicPr>
@@ -2865,8 +2982,8 @@
         </p:blipFill>
         <p:spPr>
           <a:xfrm>
-            <a:off x="3127248" y="5797296"/>
-            <a:ext cx="256032" cy="256032"/>
+            <a:off x="3127248" y="6016752"/>
+            <a:ext cx="274320" cy="274320"/>
           </a:xfrm>
           <a:prstGeom prst="rect">
             <a:avLst/>
@@ -2875,13 +2992,13 @@
       </p:pic>
       <p:sp>
         <p:nvSpPr>
-          <p:cNvPr id="31" name="Text 23"/>
-          <p:cNvSpPr txBox="1"/>
-          <p:nvPr/>
-        </p:nvSpPr>
-        <p:spPr>
-          <a:xfrm>
-            <a:off x="3493008" y="5870448"/>
+          <p:cNvPr id="34" name="Text 26"/>
+          <p:cNvSpPr txBox="1"/>
+          <p:nvPr/>
+        </p:nvSpPr>
+        <p:spPr>
+          <a:xfrm>
+            <a:off x="3511296" y="6099048"/>
             <a:ext cx="2194560" cy="182880"/>
           </a:xfrm>
           <a:prstGeom prst="rect">
@@ -2898,7 +3015,7 @@
               <a:buNone/>
             </a:pPr>
             <a:r>
-              <a:rPr lang="en-US" sz="850" spc="180" kern="0" dirty="0">
+              <a:rPr lang="en-US" sz="900" spc="180" kern="0" dirty="0">
                 <a:solidFill>
                   <a:srgbClr val="F2EEE3"/>
                 </a:solidFill>
@@ -2908,13 +3025,13 @@
               </a:rPr>
               <a:t>EFICIÊNCIA</a:t>
             </a:r>
-            <a:endParaRPr lang="en-US" sz="850" dirty="0"/>
+            <a:endParaRPr lang="en-US" sz="900" dirty="0"/>
           </a:p>
         </p:txBody>
       </p:sp>
       <p:pic>
         <p:nvPicPr>
-          <p:cNvPr id="32" name="Image 6" descr="/home/user/clipping/design-system/.preview/deck-assets/ico/removal-acid.png">    </p:cNvPr>
+          <p:cNvPr id="35" name="Image 6" descr="/home/user/clipping/design-system/.preview/deck-assets/ico/removal-acid.png">    </p:cNvPr>
           <p:cNvPicPr>
             <a:picLocks noChangeAspect="1"/>
           </p:cNvPicPr>
@@ -2928,8 +3045,8 @@
         </p:blipFill>
         <p:spPr>
           <a:xfrm>
-            <a:off x="5596128" y="5797296"/>
-            <a:ext cx="256032" cy="256032"/>
+            <a:off x="5596128" y="6016752"/>
+            <a:ext cx="274320" cy="274320"/>
           </a:xfrm>
           <a:prstGeom prst="rect">
             <a:avLst/>
@@ -2938,13 +3055,13 @@
       </p:pic>
       <p:sp>
         <p:nvSpPr>
-          <p:cNvPr id="33" name="Text 24"/>
-          <p:cNvSpPr txBox="1"/>
-          <p:nvPr/>
-        </p:nvSpPr>
-        <p:spPr>
-          <a:xfrm>
-            <a:off x="5961888" y="5870448"/>
+          <p:cNvPr id="36" name="Text 27"/>
+          <p:cNvSpPr txBox="1"/>
+          <p:nvPr/>
+        </p:nvSpPr>
+        <p:spPr>
+          <a:xfrm>
+            <a:off x="5980176" y="6099048"/>
             <a:ext cx="2194560" cy="182880"/>
           </a:xfrm>
           <a:prstGeom prst="rect">
@@ -2961,7 +3078,7 @@
               <a:buNone/>
             </a:pPr>
             <a:r>
-              <a:rPr lang="en-US" sz="850" spc="180" kern="0" dirty="0">
+              <a:rPr lang="en-US" sz="900" spc="180" kern="0" dirty="0">
                 <a:solidFill>
                   <a:srgbClr val="F2EEE3"/>
                 </a:solidFill>
@@ -2971,7 +3088,7 @@
               </a:rPr>
               <a:t>REMOÇÃO DE CARBONO</a:t>
             </a:r>
-            <a:endParaRPr lang="en-US" sz="850" dirty="0"/>
+            <a:endParaRPr lang="en-US" sz="900" dirty="0"/>
           </a:p>
         </p:txBody>
       </p:sp>
@@ -3265,7 +3382,7 @@
         <p:spPr>
           <a:xfrm>
             <a:off x="5797296" y="2423160"/>
-            <a:ext cx="457200" cy="201168"/>
+            <a:ext cx="457200" cy="237744"/>
           </a:xfrm>
           <a:prstGeom prst="rect">
             <a:avLst/>
@@ -3328,7 +3445,7 @@
                 <a:ea typeface="Arial" pitchFamily="34" charset="-122"/>
                 <a:cs typeface="Arial" pitchFamily="34" charset="-120"/>
               </a:rPr>
-              <a:t>Matéria-prima local</a:t>
+              <a:t>Matéria-prima</a:t>
             </a:r>
             <a:endParaRPr lang="en-US" sz="1400" dirty="0"/>
           </a:p>
@@ -3342,8 +3459,8 @@
         </p:nvSpPr>
         <p:spPr>
           <a:xfrm>
-            <a:off x="6272784" y="2706624"/>
-            <a:ext cx="5120640" cy="566928"/>
+            <a:off x="6272784" y="2724912"/>
+            <a:ext cx="5120640" cy="603504"/>
           </a:xfrm>
           <a:prstGeom prst="rect">
             <a:avLst/>
@@ -3357,12 +3474,12 @@
           <a:p>
             <a:pPr indent="0" marL="0">
               <a:lnSpc>
-                <a:spcPts val="1575"/>
+                <a:spcPts val="1725"/>
               </a:lnSpc>
               <a:buNone/>
             </a:pPr>
             <a:r>
-              <a:rPr lang="en-US" sz="1050" dirty="0">
+              <a:rPr lang="en-US" sz="1150" dirty="0">
                 <a:solidFill>
                   <a:srgbClr val="AEB7B9"/>
                 </a:solidFill>
@@ -3370,9 +3487,9 @@
                 <a:ea typeface="Arial" pitchFamily="34" charset="-122"/>
                 <a:cs typeface="Arial" pitchFamily="34" charset="-120"/>
               </a:rPr>
-              <a:t>O sistema parte do fluxo já gerado na unidade, reduzindo etapas de manejo quando a logística permitir.</a:t>
-            </a:r>
-            <a:endParaRPr lang="en-US" sz="1050" dirty="0"/>
+              <a:t>O sistema parte do fluxo já gerado na unidade, reduzindo etapas de manejo, logística e disposição.</a:t>
+            </a:r>
+            <a:endParaRPr lang="en-US" sz="1150" dirty="0"/>
           </a:p>
         </p:txBody>
       </p:sp>
@@ -3431,7 +3548,7 @@
         <p:spPr>
           <a:xfrm>
             <a:off x="5797296" y="3557016"/>
-            <a:ext cx="457200" cy="201168"/>
+            <a:ext cx="457200" cy="237744"/>
           </a:xfrm>
           <a:prstGeom prst="rect">
             <a:avLst/>
@@ -3508,8 +3625,8 @@
         </p:nvSpPr>
         <p:spPr>
           <a:xfrm>
-            <a:off x="6272784" y="3840480"/>
-            <a:ext cx="5120640" cy="566928"/>
+            <a:off x="6272784" y="3858768"/>
+            <a:ext cx="5120640" cy="603504"/>
           </a:xfrm>
           <a:prstGeom prst="rect">
             <a:avLst/>
@@ -3523,12 +3640,12 @@
           <a:p>
             <a:pPr indent="0" marL="0">
               <a:lnSpc>
-                <a:spcPts val="1575"/>
+                <a:spcPts val="1725"/>
               </a:lnSpc>
               <a:buNone/>
             </a:pPr>
             <a:r>
-              <a:rPr lang="en-US" sz="1050" dirty="0">
+              <a:rPr lang="en-US" sz="1150" dirty="0">
                 <a:solidFill>
                   <a:srgbClr val="AEB7B9"/>
                 </a:solidFill>
@@ -3538,7 +3655,7 @@
               </a:rPr>
               <a:t>Os gases do processo podem retornar como calor, elevando a eficiência e reduzindo demanda externa.</a:t>
             </a:r>
-            <a:endParaRPr lang="en-US" sz="1050" dirty="0"/>
+            <a:endParaRPr lang="en-US" sz="1150" dirty="0"/>
           </a:p>
         </p:txBody>
       </p:sp>
@@ -3597,7 +3714,7 @@
         <p:spPr>
           <a:xfrm>
             <a:off x="5797296" y="4690872"/>
-            <a:ext cx="457200" cy="201168"/>
+            <a:ext cx="457200" cy="237744"/>
           </a:xfrm>
           <a:prstGeom prst="rect">
             <a:avLst/>
@@ -3660,7 +3777,7 @@
                 <a:ea typeface="Arial" pitchFamily="34" charset="-122"/>
                 <a:cs typeface="Arial" pitchFamily="34" charset="-120"/>
               </a:rPr>
-              <a:t>Configuração sob medida</a:t>
+              <a:t>Configuração sob demanda</a:t>
             </a:r>
             <a:endParaRPr lang="en-US" sz="1400" dirty="0"/>
           </a:p>
@@ -3674,8 +3791,8 @@
         </p:nvSpPr>
         <p:spPr>
           <a:xfrm>
-            <a:off x="6272784" y="4974336"/>
-            <a:ext cx="5120640" cy="566928"/>
+            <a:off x="6272784" y="4992624"/>
+            <a:ext cx="5120640" cy="603504"/>
           </a:xfrm>
           <a:prstGeom prst="rect">
             <a:avLst/>
@@ -3689,12 +3806,12 @@
           <a:p>
             <a:pPr indent="0" marL="0">
               <a:lnSpc>
-                <a:spcPts val="1575"/>
+                <a:spcPts val="1725"/>
               </a:lnSpc>
               <a:buNone/>
             </a:pPr>
             <a:r>
-              <a:rPr lang="en-US" sz="1050" dirty="0">
+              <a:rPr lang="en-US" sz="1150" dirty="0">
                 <a:solidFill>
                   <a:srgbClr val="AEB7B9"/>
                 </a:solidFill>
@@ -3702,9 +3819,9 @@
                 <a:ea typeface="Arial" pitchFamily="34" charset="-122"/>
                 <a:cs typeface="Arial" pitchFamily="34" charset="-120"/>
               </a:rPr>
-              <a:t>Escala, preparo e tecnologia seguem volume, umidade, granulometria e rotina operacional de Petrolina.</a:t>
-            </a:r>
-            <a:endParaRPr lang="en-US" sz="1050" dirty="0"/>
+              <a:t>Preparo e tecnologia se adequam à escala, umidade, granulometria e rotina operacional de Petrolina.</a:t>
+            </a:r>
+            <a:endParaRPr lang="en-US" sz="1150" dirty="0"/>
           </a:p>
         </p:txBody>
       </p:sp>
@@ -4043,11 +4160,11 @@
         <p:spPr>
           <a:xfrm>
             <a:off x="658368" y="3072384"/>
-            <a:ext cx="2542032" cy="1316736"/>
+            <a:ext cx="2542032" cy="1499616"/>
           </a:xfrm>
           <a:prstGeom prst="roundRect">
             <a:avLst>
-              <a:gd name="adj" fmla="val 4167"/>
+              <a:gd name="adj" fmla="val 3659"/>
             </a:avLst>
           </a:prstGeom>
           <a:solidFill>
@@ -4094,7 +4211,7 @@
         <p:spPr>
           <a:xfrm>
             <a:off x="1298448" y="3300984"/>
-            <a:ext cx="457200" cy="201168"/>
+            <a:ext cx="457200" cy="237744"/>
           </a:xfrm>
           <a:prstGeom prst="rect">
             <a:avLst/>
@@ -4171,24 +4288,27 @@
         </p:nvSpPr>
         <p:spPr>
           <a:xfrm>
-            <a:off x="896112" y="4041648"/>
-            <a:ext cx="2066544" cy="201168"/>
-          </a:xfrm>
-          <a:prstGeom prst="rect">
-            <a:avLst/>
-          </a:prstGeom>
-          <a:noFill/>
-          <a:ln/>
-        </p:spPr>
-        <p:txBody>
-          <a:bodyPr wrap="square" lIns="0" tIns="0" rIns="0" bIns="0" rtlCol="0" anchor="ctr"/>
-          <a:lstStyle/>
-          <a:p>
-            <a:pPr algn="l" indent="0" marL="0">
-              <a:buNone/>
-            </a:pPr>
-            <a:r>
-              <a:rPr lang="en-US" sz="950" dirty="0">
+            <a:off x="896112" y="4059936"/>
+            <a:ext cx="2066544" cy="475488"/>
+          </a:xfrm>
+          <a:prstGeom prst="rect">
+            <a:avLst/>
+          </a:prstGeom>
+          <a:noFill/>
+          <a:ln/>
+        </p:spPr>
+        <p:txBody>
+          <a:bodyPr wrap="square" lIns="0" tIns="0" rIns="0" bIns="0" rtlCol="0" anchor="t"/>
+          <a:lstStyle/>
+          <a:p>
+            <a:pPr indent="0" marL="0">
+              <a:lnSpc>
+                <a:spcPts val="1650"/>
+              </a:lnSpc>
+              <a:buNone/>
+            </a:pPr>
+            <a:r>
+              <a:rPr lang="en-US" sz="1100" dirty="0">
                 <a:solidFill>
                   <a:srgbClr val="4A3320"/>
                 </a:solidFill>
@@ -4198,7 +4318,7 @@
               </a:rPr>
               <a:t>custo evitado ou valor preservado</a:t>
             </a:r>
-            <a:endParaRPr lang="en-US" sz="950" dirty="0"/>
+            <a:endParaRPr lang="en-US" sz="1100" dirty="0"/>
           </a:p>
         </p:txBody>
       </p:sp>
@@ -4211,11 +4331,11 @@
         <p:spPr>
           <a:xfrm>
             <a:off x="3419856" y="3072384"/>
-            <a:ext cx="2542032" cy="1316736"/>
+            <a:ext cx="2542032" cy="1499616"/>
           </a:xfrm>
           <a:prstGeom prst="roundRect">
             <a:avLst>
-              <a:gd name="adj" fmla="val 4167"/>
+              <a:gd name="adj" fmla="val 3659"/>
             </a:avLst>
           </a:prstGeom>
           <a:solidFill>
@@ -4262,7 +4382,7 @@
         <p:spPr>
           <a:xfrm>
             <a:off x="4059936" y="3300984"/>
-            <a:ext cx="457200" cy="201168"/>
+            <a:ext cx="457200" cy="237744"/>
           </a:xfrm>
           <a:prstGeom prst="rect">
             <a:avLst/>
@@ -4339,24 +4459,27 @@
         </p:nvSpPr>
         <p:spPr>
           <a:xfrm>
-            <a:off x="3657600" y="4041648"/>
-            <a:ext cx="2066544" cy="201168"/>
-          </a:xfrm>
-          <a:prstGeom prst="rect">
-            <a:avLst/>
-          </a:prstGeom>
-          <a:noFill/>
-          <a:ln/>
-        </p:spPr>
-        <p:txBody>
-          <a:bodyPr wrap="square" lIns="0" tIns="0" rIns="0" bIns="0" rtlCol="0" anchor="ctr"/>
-          <a:lstStyle/>
-          <a:p>
-            <a:pPr algn="l" indent="0" marL="0">
-              <a:buNone/>
-            </a:pPr>
-            <a:r>
-              <a:rPr lang="en-US" sz="950" dirty="0">
+            <a:off x="3657600" y="4059936"/>
+            <a:ext cx="2066544" cy="475488"/>
+          </a:xfrm>
+          <a:prstGeom prst="rect">
+            <a:avLst/>
+          </a:prstGeom>
+          <a:noFill/>
+          <a:ln/>
+        </p:spPr>
+        <p:txBody>
+          <a:bodyPr wrap="square" lIns="0" tIns="0" rIns="0" bIns="0" rtlCol="0" anchor="t"/>
+          <a:lstStyle/>
+          <a:p>
+            <a:pPr indent="0" marL="0">
+              <a:lnSpc>
+                <a:spcPts val="1650"/>
+              </a:lnSpc>
+              <a:buNone/>
+            </a:pPr>
+            <a:r>
+              <a:rPr lang="en-US" sz="1100" dirty="0">
                 <a:solidFill>
                   <a:srgbClr val="4A3320"/>
                 </a:solidFill>
@@ -4366,7 +4489,7 @@
               </a:rPr>
               <a:t>receita e rota de aplicação</a:t>
             </a:r>
-            <a:endParaRPr lang="en-US" sz="950" dirty="0"/>
+            <a:endParaRPr lang="en-US" sz="1100" dirty="0"/>
           </a:p>
         </p:txBody>
       </p:sp>
@@ -4379,11 +4502,11 @@
         <p:spPr>
           <a:xfrm>
             <a:off x="6181344" y="3072384"/>
-            <a:ext cx="2542032" cy="1316736"/>
+            <a:ext cx="2542032" cy="1499616"/>
           </a:xfrm>
           <a:prstGeom prst="roundRect">
             <a:avLst>
-              <a:gd name="adj" fmla="val 4167"/>
+              <a:gd name="adj" fmla="val 3659"/>
             </a:avLst>
           </a:prstGeom>
           <a:solidFill>
@@ -4430,7 +4553,7 @@
         <p:spPr>
           <a:xfrm>
             <a:off x="6821424" y="3300984"/>
-            <a:ext cx="457200" cy="201168"/>
+            <a:ext cx="457200" cy="237744"/>
           </a:xfrm>
           <a:prstGeom prst="rect">
             <a:avLst/>
@@ -4507,24 +4630,27 @@
         </p:nvSpPr>
         <p:spPr>
           <a:xfrm>
-            <a:off x="6419088" y="4041648"/>
-            <a:ext cx="2066544" cy="201168"/>
-          </a:xfrm>
-          <a:prstGeom prst="rect">
-            <a:avLst/>
-          </a:prstGeom>
-          <a:noFill/>
-          <a:ln/>
-        </p:spPr>
-        <p:txBody>
-          <a:bodyPr wrap="square" lIns="0" tIns="0" rIns="0" bIns="0" rtlCol="0" anchor="ctr"/>
-          <a:lstStyle/>
-          <a:p>
-            <a:pPr algn="l" indent="0" marL="0">
-              <a:buNone/>
-            </a:pPr>
-            <a:r>
-              <a:rPr lang="en-US" sz="950" dirty="0">
+            <a:off x="6419088" y="4059936"/>
+            <a:ext cx="2066544" cy="475488"/>
+          </a:xfrm>
+          <a:prstGeom prst="rect">
+            <a:avLst/>
+          </a:prstGeom>
+          <a:noFill/>
+          <a:ln/>
+        </p:spPr>
+        <p:txBody>
+          <a:bodyPr wrap="square" lIns="0" tIns="0" rIns="0" bIns="0" rtlCol="0" anchor="t"/>
+          <a:lstStyle/>
+          <a:p>
+            <a:pPr indent="0" marL="0">
+              <a:lnSpc>
+                <a:spcPts val="1650"/>
+              </a:lnSpc>
+              <a:buNone/>
+            </a:pPr>
+            <a:r>
+              <a:rPr lang="en-US" sz="1100" dirty="0">
                 <a:solidFill>
                   <a:srgbClr val="4A3320"/>
                 </a:solidFill>
@@ -4534,7 +4660,7 @@
               </a:rPr>
               <a:t>integração e eficiência térmica</a:t>
             </a:r>
-            <a:endParaRPr lang="en-US" sz="950" dirty="0"/>
+            <a:endParaRPr lang="en-US" sz="1100" dirty="0"/>
           </a:p>
         </p:txBody>
       </p:sp>
@@ -4547,11 +4673,11 @@
         <p:spPr>
           <a:xfrm>
             <a:off x="8942832" y="3072384"/>
-            <a:ext cx="2542032" cy="1316736"/>
+            <a:ext cx="2542032" cy="1499616"/>
           </a:xfrm>
           <a:prstGeom prst="roundRect">
             <a:avLst>
-              <a:gd name="adj" fmla="val 4167"/>
+              <a:gd name="adj" fmla="val 3659"/>
             </a:avLst>
           </a:prstGeom>
           <a:solidFill>
@@ -4598,7 +4724,7 @@
         <p:spPr>
           <a:xfrm>
             <a:off x="9582912" y="3300984"/>
-            <a:ext cx="457200" cy="201168"/>
+            <a:ext cx="457200" cy="237744"/>
           </a:xfrm>
           <a:prstGeom prst="rect">
             <a:avLst/>
@@ -4675,86 +4801,8 @@
         </p:nvSpPr>
         <p:spPr>
           <a:xfrm>
-            <a:off x="9180576" y="4041648"/>
-            <a:ext cx="2066544" cy="201168"/>
-          </a:xfrm>
-          <a:prstGeom prst="rect">
-            <a:avLst/>
-          </a:prstGeom>
-          <a:noFill/>
-          <a:ln/>
-        </p:spPr>
-        <p:txBody>
-          <a:bodyPr wrap="square" lIns="0" tIns="0" rIns="0" bIns="0" rtlCol="0" anchor="ctr"/>
-          <a:lstStyle/>
-          <a:p>
-            <a:pPr algn="l" indent="0" marL="0">
-              <a:buNone/>
-            </a:pPr>
-            <a:r>
-              <a:rPr lang="en-US" sz="950" dirty="0">
-                <a:solidFill>
-                  <a:srgbClr val="AEB7B9"/>
-                </a:solidFill>
-                <a:latin typeface="Arial" pitchFamily="34" charset="0"/>
-                <a:ea typeface="Arial" pitchFamily="34" charset="-122"/>
-                <a:cs typeface="Arial" pitchFamily="34" charset="-120"/>
-              </a:rPr>
-              <a:t>remoção líquida certificável</a:t>
-            </a:r>
-            <a:endParaRPr lang="en-US" sz="950" dirty="0"/>
-          </a:p>
-        </p:txBody>
-      </p:sp>
-      <p:sp>
-        <p:nvSpPr>
-          <p:cNvPr id="27" name="Text 21"/>
-          <p:cNvSpPr txBox="1"/>
-          <p:nvPr/>
-        </p:nvSpPr>
-        <p:spPr>
-          <a:xfrm>
-            <a:off x="658368" y="4700016"/>
-            <a:ext cx="3657600" cy="182880"/>
-          </a:xfrm>
-          <a:prstGeom prst="rect">
-            <a:avLst/>
-          </a:prstGeom>
-          <a:noFill/>
-          <a:ln/>
-        </p:spPr>
-        <p:txBody>
-          <a:bodyPr wrap="square" lIns="0" tIns="0" rIns="0" bIns="0" rtlCol="0" anchor="ctr"/>
-          <a:lstStyle/>
-          <a:p>
-            <a:pPr algn="l" indent="0" marL="0">
-              <a:buNone/>
-            </a:pPr>
-            <a:r>
-              <a:rPr lang="en-US" sz="850" spc="180" kern="0" dirty="0">
-                <a:solidFill>
-                  <a:srgbClr val="4A3320"/>
-                </a:solidFill>
-                <a:latin typeface="Arial" pitchFamily="34" charset="0"/>
-                <a:ea typeface="Arial" pitchFamily="34" charset="-122"/>
-                <a:cs typeface="Arial" pitchFamily="34" charset="-120"/>
-              </a:rPr>
-              <a:t>ROBUSTEZ ECONÔMICA</a:t>
-            </a:r>
-            <a:endParaRPr lang="en-US" sz="850" dirty="0"/>
-          </a:p>
-        </p:txBody>
-      </p:sp>
-      <p:sp>
-        <p:nvSpPr>
-          <p:cNvPr id="28" name="Text 22"/>
-          <p:cNvSpPr txBox="1"/>
-          <p:nvPr/>
-        </p:nvSpPr>
-        <p:spPr>
-          <a:xfrm>
-            <a:off x="658368" y="4937760"/>
-            <a:ext cx="6949440" cy="640080"/>
+            <a:off x="9180576" y="4059936"/>
+            <a:ext cx="2066544" cy="475488"/>
           </a:xfrm>
           <a:prstGeom prst="rect">
             <a:avLst/>
@@ -4768,12 +4816,93 @@
           <a:p>
             <a:pPr indent="0" marL="0">
               <a:lnSpc>
-                <a:spcPts val="1725"/>
+                <a:spcPts val="1650"/>
               </a:lnSpc>
               <a:buNone/>
             </a:pPr>
             <a:r>
-              <a:rPr lang="en-US" sz="1150" dirty="0">
+              <a:rPr lang="en-US" sz="1100" dirty="0">
+                <a:solidFill>
+                  <a:srgbClr val="AEB7B9"/>
+                </a:solidFill>
+                <a:latin typeface="Arial" pitchFamily="34" charset="0"/>
+                <a:ea typeface="Arial" pitchFamily="34" charset="-122"/>
+                <a:cs typeface="Arial" pitchFamily="34" charset="-120"/>
+              </a:rPr>
+              <a:t>remoção líquida certificável</a:t>
+            </a:r>
+            <a:endParaRPr lang="en-US" sz="1100" dirty="0"/>
+          </a:p>
+        </p:txBody>
+      </p:sp>
+      <p:sp>
+        <p:nvSpPr>
+          <p:cNvPr id="27" name="Text 21"/>
+          <p:cNvSpPr txBox="1"/>
+          <p:nvPr/>
+        </p:nvSpPr>
+        <p:spPr>
+          <a:xfrm>
+            <a:off x="658368" y="4846320"/>
+            <a:ext cx="3657600" cy="182880"/>
+          </a:xfrm>
+          <a:prstGeom prst="rect">
+            <a:avLst/>
+          </a:prstGeom>
+          <a:noFill/>
+          <a:ln/>
+        </p:spPr>
+        <p:txBody>
+          <a:bodyPr wrap="square" lIns="0" tIns="0" rIns="0" bIns="0" rtlCol="0" anchor="ctr"/>
+          <a:lstStyle/>
+          <a:p>
+            <a:pPr algn="l" indent="0" marL="0">
+              <a:buNone/>
+            </a:pPr>
+            <a:r>
+              <a:rPr lang="en-US" sz="850" spc="180" kern="0" dirty="0">
+                <a:solidFill>
+                  <a:srgbClr val="4A3320"/>
+                </a:solidFill>
+                <a:latin typeface="Arial" pitchFamily="34" charset="0"/>
+                <a:ea typeface="Arial" pitchFamily="34" charset="-122"/>
+                <a:cs typeface="Arial" pitchFamily="34" charset="-120"/>
+              </a:rPr>
+              <a:t>ROBUSTEZ ECONÔMICA</a:t>
+            </a:r>
+            <a:endParaRPr lang="en-US" sz="850" dirty="0"/>
+          </a:p>
+        </p:txBody>
+      </p:sp>
+      <p:sp>
+        <p:nvSpPr>
+          <p:cNvPr id="28" name="Text 22"/>
+          <p:cNvSpPr txBox="1"/>
+          <p:nvPr/>
+        </p:nvSpPr>
+        <p:spPr>
+          <a:xfrm>
+            <a:off x="658368" y="5084064"/>
+            <a:ext cx="6949440" cy="640080"/>
+          </a:xfrm>
+          <a:prstGeom prst="rect">
+            <a:avLst/>
+          </a:prstGeom>
+          <a:noFill/>
+          <a:ln/>
+        </p:spPr>
+        <p:txBody>
+          <a:bodyPr wrap="square" lIns="0" tIns="0" rIns="0" bIns="0" rtlCol="0" anchor="t"/>
+          <a:lstStyle/>
+          <a:p>
+            <a:pPr indent="0" marL="0">
+              <a:lnSpc>
+                <a:spcPts val="1800"/>
+              </a:lnSpc>
+              <a:buNone/>
+            </a:pPr>
+            <a:r>
+              <a:rPr lang="en-US" sz="1200" dirty="0">
                 <a:solidFill>
                   <a:srgbClr val="1E3320"/>
                 </a:solidFill>
@@ -4783,7 +4912,7 @@
               </a:rPr>
               <a:t>O valor não precisa vir de uma única fonte. O desenho mais eficiente captura o conjunto — e valida cada alavanca com dados reais.</a:t>
             </a:r>
-            <a:endParaRPr lang="en-US" sz="1150" dirty="0"/>
+            <a:endParaRPr lang="en-US" sz="1200" dirty="0"/>
           </a:p>
         </p:txBody>
       </p:sp>
@@ -4795,7 +4924,7 @@
         </p:nvSpPr>
         <p:spPr>
           <a:xfrm>
-            <a:off x="7863840" y="4626864"/>
+            <a:off x="7863840" y="4791456"/>
             <a:ext cx="3666744" cy="1005840"/>
           </a:xfrm>
           <a:prstGeom prst="roundRect">
@@ -4822,7 +4951,7 @@
         </p:nvSpPr>
         <p:spPr>
           <a:xfrm>
-            <a:off x="8101584" y="4626864"/>
+            <a:off x="8101584" y="4791456"/>
             <a:ext cx="3200400" cy="1005840"/>
           </a:xfrm>
           <a:prstGeom prst="rect">
@@ -5174,7 +5303,7 @@
         <p:spPr>
           <a:xfrm>
             <a:off x="6492240" y="3236976"/>
-            <a:ext cx="457200" cy="201168"/>
+            <a:ext cx="457200" cy="237744"/>
           </a:xfrm>
           <a:prstGeom prst="rect">
             <a:avLst/>
@@ -5251,8 +5380,8 @@
         </p:nvSpPr>
         <p:spPr>
           <a:xfrm>
-            <a:off x="9144000" y="3246120"/>
-            <a:ext cx="2377440" cy="201168"/>
+            <a:off x="9144000" y="3236976"/>
+            <a:ext cx="2395728" cy="237744"/>
           </a:xfrm>
           <a:prstGeom prst="rect">
             <a:avLst/>
@@ -5268,7 +5397,7 @@
               <a:buNone/>
             </a:pPr>
             <a:r>
-              <a:rPr lang="en-US" sz="950" dirty="0">
+              <a:rPr lang="en-US" sz="1100" dirty="0">
                 <a:solidFill>
                   <a:srgbClr val="AEB7B9"/>
                 </a:solidFill>
@@ -5278,7 +5407,7 @@
               </a:rPr>
               <a:t>carbono de origem biogênica</a:t>
             </a:r>
-            <a:endParaRPr lang="en-US" sz="950" dirty="0"/>
+            <a:endParaRPr lang="en-US" sz="1100" dirty="0"/>
           </a:p>
         </p:txBody>
       </p:sp>
@@ -5362,7 +5491,7 @@
         <p:spPr>
           <a:xfrm>
             <a:off x="6492240" y="4005072"/>
-            <a:ext cx="457200" cy="201168"/>
+            <a:ext cx="457200" cy="237744"/>
           </a:xfrm>
           <a:prstGeom prst="rect">
             <a:avLst/>
@@ -5439,8 +5568,8 @@
         </p:nvSpPr>
         <p:spPr>
           <a:xfrm>
-            <a:off x="9144000" y="4014216"/>
-            <a:ext cx="2377440" cy="201168"/>
+            <a:off x="9144000" y="4005072"/>
+            <a:ext cx="2395728" cy="237744"/>
           </a:xfrm>
           <a:prstGeom prst="rect">
             <a:avLst/>
@@ -5456,7 +5585,7 @@
               <a:buNone/>
             </a:pPr>
             <a:r>
-              <a:rPr lang="en-US" sz="950" dirty="0">
+              <a:rPr lang="en-US" sz="1100" dirty="0">
                 <a:solidFill>
                   <a:srgbClr val="AEB7B9"/>
                 </a:solidFill>
@@ -5466,7 +5595,7 @@
               </a:rPr>
               <a:t>conversão sob controle</a:t>
             </a:r>
-            <a:endParaRPr lang="en-US" sz="950" dirty="0"/>
+            <a:endParaRPr lang="en-US" sz="1100" dirty="0"/>
           </a:p>
         </p:txBody>
       </p:sp>
@@ -5550,7 +5679,7 @@
         <p:spPr>
           <a:xfrm>
             <a:off x="6492240" y="4773168"/>
-            <a:ext cx="457200" cy="201168"/>
+            <a:ext cx="457200" cy="237744"/>
           </a:xfrm>
           <a:prstGeom prst="rect">
             <a:avLst/>
@@ -5627,8 +5756,8 @@
         </p:nvSpPr>
         <p:spPr>
           <a:xfrm>
-            <a:off x="9144000" y="4782312"/>
-            <a:ext cx="2377440" cy="201168"/>
+            <a:off x="9144000" y="4773168"/>
+            <a:ext cx="2395728" cy="237744"/>
           </a:xfrm>
           <a:prstGeom prst="rect">
             <a:avLst/>
@@ -5644,7 +5773,7 @@
               <a:buNone/>
             </a:pPr>
             <a:r>
-              <a:rPr lang="en-US" sz="950" dirty="0">
+              <a:rPr lang="en-US" sz="1100" dirty="0">
                 <a:solidFill>
                   <a:srgbClr val="AEB7B9"/>
                 </a:solidFill>
@@ -5654,7 +5783,7 @@
               </a:rPr>
               <a:t>carbono em material estável</a:t>
             </a:r>
-            <a:endParaRPr lang="en-US" sz="950" dirty="0"/>
+            <a:endParaRPr lang="en-US" sz="1100" dirty="0"/>
           </a:p>
         </p:txBody>
       </p:sp>
@@ -5738,7 +5867,7 @@
         <p:spPr>
           <a:xfrm>
             <a:off x="6492240" y="5541264"/>
-            <a:ext cx="457200" cy="201168"/>
+            <a:ext cx="457200" cy="237744"/>
           </a:xfrm>
           <a:prstGeom prst="rect">
             <a:avLst/>
@@ -5815,8 +5944,8 @@
         </p:nvSpPr>
         <p:spPr>
           <a:xfrm>
-            <a:off x="9144000" y="5550408"/>
-            <a:ext cx="2377440" cy="201168"/>
+            <a:off x="9144000" y="5541264"/>
+            <a:ext cx="2395728" cy="237744"/>
           </a:xfrm>
           <a:prstGeom prst="rect">
             <a:avLst/>
@@ -5832,7 +5961,7 @@
               <a:buNone/>
             </a:pPr>
             <a:r>
-              <a:rPr lang="en-US" sz="950" dirty="0">
+              <a:rPr lang="en-US" sz="1100" dirty="0">
                 <a:solidFill>
                   <a:srgbClr val="AEB7B9"/>
                 </a:solidFill>
@@ -5842,7 +5971,7 @@
               </a:rPr>
               <a:t>armazenamento de longa duração</a:t>
             </a:r>
-            <a:endParaRPr lang="en-US" sz="950" dirty="0"/>
+            <a:endParaRPr lang="en-US" sz="1100" dirty="0"/>
           </a:p>
         </p:txBody>
       </p:sp>
@@ -6161,7 +6290,7 @@
         </p:blipFill>
         <p:spPr>
           <a:xfrm>
-            <a:off x="658368" y="2907792"/>
+            <a:off x="658368" y="2779776"/>
             <a:ext cx="274320" cy="274320"/>
           </a:xfrm>
           <a:prstGeom prst="rect">
@@ -6177,8 +6306,8 @@
         </p:nvSpPr>
         <p:spPr>
           <a:xfrm>
-            <a:off x="1060704" y="2916936"/>
-            <a:ext cx="365760" cy="201168"/>
+            <a:off x="1060704" y="2788920"/>
+            <a:ext cx="365760" cy="237744"/>
           </a:xfrm>
           <a:prstGeom prst="rect">
             <a:avLst/>
@@ -6216,8 +6345,8 @@
         </p:nvSpPr>
         <p:spPr>
           <a:xfrm>
-            <a:off x="1481328" y="2889504"/>
-            <a:ext cx="3200400" cy="256032"/>
+            <a:off x="1481328" y="2761488"/>
+            <a:ext cx="5120640" cy="256032"/>
           </a:xfrm>
           <a:prstGeom prst="rect">
             <a:avLst/>
@@ -6255,8 +6384,8 @@
         </p:nvSpPr>
         <p:spPr>
           <a:xfrm>
-            <a:off x="4773168" y="2916936"/>
-            <a:ext cx="2651760" cy="201168"/>
+            <a:off x="1481328" y="3072384"/>
+            <a:ext cx="5120640" cy="237744"/>
           </a:xfrm>
           <a:prstGeom prst="rect">
             <a:avLst/>
@@ -6272,7 +6401,7 @@
               <a:buNone/>
             </a:pPr>
             <a:r>
-              <a:rPr lang="en-US" sz="950" dirty="0">
+              <a:rPr lang="en-US" sz="1100" dirty="0">
                 <a:solidFill>
                   <a:srgbClr val="4A3320"/>
                 </a:solidFill>
@@ -6282,7 +6411,7 @@
               </a:rPr>
               <a:t>massa crítica e perfil de geração</a:t>
             </a:r>
-            <a:endParaRPr lang="en-US" sz="950" dirty="0"/>
+            <a:endParaRPr lang="en-US" sz="1100" dirty="0"/>
           </a:p>
         </p:txBody>
       </p:sp>
@@ -6294,7 +6423,7 @@
         </p:nvSpPr>
         <p:spPr>
           <a:xfrm>
-            <a:off x="658368" y="3474720"/>
+            <a:off x="658368" y="3419856"/>
             <a:ext cx="6126480" cy="10058"/>
           </a:xfrm>
           <a:prstGeom prst="rect">
@@ -6324,7 +6453,7 @@
         </p:blipFill>
         <p:spPr>
           <a:xfrm>
-            <a:off x="658368" y="3694176"/>
+            <a:off x="658368" y="3639312"/>
             <a:ext cx="274320" cy="274320"/>
           </a:xfrm>
           <a:prstGeom prst="rect">
@@ -6340,8 +6469,8 @@
         </p:nvSpPr>
         <p:spPr>
           <a:xfrm>
-            <a:off x="1060704" y="3703320"/>
-            <a:ext cx="365760" cy="201168"/>
+            <a:off x="1060704" y="3648456"/>
+            <a:ext cx="365760" cy="237744"/>
           </a:xfrm>
           <a:prstGeom prst="rect">
             <a:avLst/>
@@ -6379,8 +6508,8 @@
         </p:nvSpPr>
         <p:spPr>
           <a:xfrm>
-            <a:off x="1481328" y="3675888"/>
-            <a:ext cx="3200400" cy="256032"/>
+            <a:off x="1481328" y="3621024"/>
+            <a:ext cx="5120640" cy="256032"/>
           </a:xfrm>
           <a:prstGeom prst="rect">
             <a:avLst/>
@@ -6418,8 +6547,8 @@
         </p:nvSpPr>
         <p:spPr>
           <a:xfrm>
-            <a:off x="4773168" y="3703320"/>
-            <a:ext cx="2651760" cy="201168"/>
+            <a:off x="1481328" y="3931920"/>
+            <a:ext cx="5120640" cy="237744"/>
           </a:xfrm>
           <a:prstGeom prst="rect">
             <a:avLst/>
@@ -6435,7 +6564,7 @@
               <a:buNone/>
             </a:pPr>
             <a:r>
-              <a:rPr lang="en-US" sz="950" dirty="0">
+              <a:rPr lang="en-US" sz="1100" dirty="0">
                 <a:solidFill>
                   <a:srgbClr val="4A3320"/>
                 </a:solidFill>
@@ -6445,7 +6574,7 @@
               </a:rPr>
               <a:t>preparo necessário e comportamento em teste</a:t>
             </a:r>
-            <a:endParaRPr lang="en-US" sz="950" dirty="0"/>
+            <a:endParaRPr lang="en-US" sz="1100" dirty="0"/>
           </a:p>
         </p:txBody>
       </p:sp>
@@ -6457,7 +6586,7 @@
         </p:nvSpPr>
         <p:spPr>
           <a:xfrm>
-            <a:off x="658368" y="4261104"/>
+            <a:off x="658368" y="4279392"/>
             <a:ext cx="6126480" cy="10058"/>
           </a:xfrm>
           <a:prstGeom prst="rect">
@@ -6487,7 +6616,7 @@
         </p:blipFill>
         <p:spPr>
           <a:xfrm>
-            <a:off x="658368" y="4480560"/>
+            <a:off x="658368" y="4498848"/>
             <a:ext cx="274320" cy="274320"/>
           </a:xfrm>
           <a:prstGeom prst="rect">
@@ -6503,8 +6632,8 @@
         </p:nvSpPr>
         <p:spPr>
           <a:xfrm>
-            <a:off x="1060704" y="4489704"/>
-            <a:ext cx="365760" cy="201168"/>
+            <a:off x="1060704" y="4507992"/>
+            <a:ext cx="365760" cy="237744"/>
           </a:xfrm>
           <a:prstGeom prst="rect">
             <a:avLst/>
@@ -6542,8 +6671,8 @@
         </p:nvSpPr>
         <p:spPr>
           <a:xfrm>
-            <a:off x="1481328" y="4462272"/>
-            <a:ext cx="3200400" cy="256032"/>
+            <a:off x="1481328" y="4480560"/>
+            <a:ext cx="5120640" cy="256032"/>
           </a:xfrm>
           <a:prstGeom prst="rect">
             <a:avLst/>
@@ -6581,8 +6710,8 @@
         </p:nvSpPr>
         <p:spPr>
           <a:xfrm>
-            <a:off x="4773168" y="4489704"/>
-            <a:ext cx="2651760" cy="201168"/>
+            <a:off x="1481328" y="4791456"/>
+            <a:ext cx="5120640" cy="237744"/>
           </a:xfrm>
           <a:prstGeom prst="rect">
             <a:avLst/>
@@ -6598,7 +6727,7 @@
               <a:buNone/>
             </a:pPr>
             <a:r>
-              <a:rPr lang="en-US" sz="950" dirty="0">
+              <a:rPr lang="en-US" sz="1100" dirty="0">
                 <a:solidFill>
                   <a:srgbClr val="4A3320"/>
                 </a:solidFill>
@@ -6608,7 +6737,7 @@
               </a:rPr>
               <a:t>baseline real para o business case</a:t>
             </a:r>
-            <a:endParaRPr lang="en-US" sz="950" dirty="0"/>
+            <a:endParaRPr lang="en-US" sz="1100" dirty="0"/>
           </a:p>
         </p:txBody>
       </p:sp>
@@ -6620,7 +6749,7 @@
         </p:nvSpPr>
         <p:spPr>
           <a:xfrm>
-            <a:off x="658368" y="5047488"/>
+            <a:off x="658368" y="5138928"/>
             <a:ext cx="6126480" cy="10058"/>
           </a:xfrm>
           <a:prstGeom prst="rect">
@@ -6650,7 +6779,7 @@
         </p:blipFill>
         <p:spPr>
           <a:xfrm>
-            <a:off x="658368" y="5266944"/>
+            <a:off x="658368" y="5358384"/>
             <a:ext cx="274320" cy="274320"/>
           </a:xfrm>
           <a:prstGeom prst="rect">
@@ -6666,8 +6795,8 @@
         </p:nvSpPr>
         <p:spPr>
           <a:xfrm>
-            <a:off x="1060704" y="5276088"/>
-            <a:ext cx="365760" cy="201168"/>
+            <a:off x="1060704" y="5367528"/>
+            <a:ext cx="365760" cy="237744"/>
           </a:xfrm>
           <a:prstGeom prst="rect">
             <a:avLst/>
@@ -6705,8 +6834,8 @@
         </p:nvSpPr>
         <p:spPr>
           <a:xfrm>
-            <a:off x="1481328" y="5248656"/>
-            <a:ext cx="3200400" cy="256032"/>
+            <a:off x="1481328" y="5340096"/>
+            <a:ext cx="5120640" cy="256032"/>
           </a:xfrm>
           <a:prstGeom prst="rect">
             <a:avLst/>
@@ -6744,8 +6873,8 @@
         </p:nvSpPr>
         <p:spPr>
           <a:xfrm>
-            <a:off x="4773168" y="5276088"/>
-            <a:ext cx="2651760" cy="201168"/>
+            <a:off x="1481328" y="5650992"/>
+            <a:ext cx="5120640" cy="237744"/>
           </a:xfrm>
           <a:prstGeom prst="rect">
             <a:avLst/>
@@ -6761,7 +6890,7 @@
               <a:buNone/>
             </a:pPr>
             <a:r>
-              <a:rPr lang="en-US" sz="950" dirty="0">
+              <a:rPr lang="en-US" sz="1100" dirty="0">
                 <a:solidFill>
                   <a:srgbClr val="4A3320"/>
                 </a:solidFill>
@@ -6771,7 +6900,7 @@
               </a:rPr>
               <a:t>condições para integrar o sistema</a:t>
             </a:r>
-            <a:endParaRPr lang="en-US" sz="950" dirty="0"/>
+            <a:endParaRPr lang="en-US" sz="1100" dirty="0"/>
           </a:p>
         </p:txBody>
       </p:sp>
@@ -6783,7 +6912,7 @@
         </p:nvSpPr>
         <p:spPr>
           <a:xfrm>
-            <a:off x="658368" y="5797296"/>
+            <a:off x="658368" y="6108192"/>
             <a:ext cx="6126480" cy="457200"/>
           </a:xfrm>
           <a:prstGeom prst="roundRect">
@@ -6810,7 +6939,7 @@
         </p:nvSpPr>
         <p:spPr>
           <a:xfrm>
-            <a:off x="877824" y="5797296"/>
+            <a:off x="877824" y="6108192"/>
             <a:ext cx="5760720" cy="182880"/>
           </a:xfrm>
           <a:prstGeom prst="rect">
@@ -7173,7 +7302,7 @@
         <p:spPr>
           <a:xfrm>
             <a:off x="1060704" y="3154680"/>
-            <a:ext cx="365760" cy="201168"/>
+            <a:ext cx="365760" cy="237744"/>
           </a:xfrm>
           <a:prstGeom prst="rect">
             <a:avLst/>
@@ -7236,7 +7365,7 @@
                 <a:ea typeface="Arial" pitchFamily="34" charset="-122"/>
                 <a:cs typeface="Arial" pitchFamily="34" charset="-120"/>
               </a:rPr>
-              <a:t>Sessão técnica</a:t>
+              <a:t>Visita técnica</a:t>
             </a:r>
             <a:endParaRPr lang="en-US" sz="1400" dirty="0"/>
           </a:p>
@@ -7250,8 +7379,8 @@
         </p:nvSpPr>
         <p:spPr>
           <a:xfrm>
-            <a:off x="3675888" y="3154680"/>
-            <a:ext cx="2377440" cy="201168"/>
+            <a:off x="3675888" y="3145536"/>
+            <a:ext cx="3017520" cy="237744"/>
           </a:xfrm>
           <a:prstGeom prst="rect">
             <a:avLst/>
@@ -7267,7 +7396,7 @@
               <a:buNone/>
             </a:pPr>
             <a:r>
-              <a:rPr lang="en-US" sz="950" dirty="0">
+              <a:rPr lang="en-US" sz="1100" dirty="0">
                 <a:solidFill>
                   <a:srgbClr val="AEB7B9"/>
                 </a:solidFill>
@@ -7277,7 +7406,7 @@
               </a:rPr>
               <a:t>Operações + Sustentabilidade</a:t>
             </a:r>
-            <a:endParaRPr lang="en-US" sz="950" dirty="0"/>
+            <a:endParaRPr lang="en-US" sz="1100" dirty="0"/>
           </a:p>
         </p:txBody>
       </p:sp>
@@ -7336,7 +7465,7 @@
         <p:spPr>
           <a:xfrm>
             <a:off x="1060704" y="3941064"/>
-            <a:ext cx="365760" cy="201168"/>
+            <a:ext cx="365760" cy="237744"/>
           </a:xfrm>
           <a:prstGeom prst="rect">
             <a:avLst/>
@@ -7413,8 +7542,8 @@
         </p:nvSpPr>
         <p:spPr>
           <a:xfrm>
-            <a:off x="3675888" y="3941064"/>
-            <a:ext cx="2377440" cy="201168"/>
+            <a:off x="3675888" y="3931920"/>
+            <a:ext cx="3017520" cy="237744"/>
           </a:xfrm>
           <a:prstGeom prst="rect">
             <a:avLst/>
@@ -7430,7 +7559,7 @@
               <a:buNone/>
             </a:pPr>
             <a:r>
-              <a:rPr lang="en-US" sz="950" dirty="0">
+              <a:rPr lang="en-US" sz="1100" dirty="0">
                 <a:solidFill>
                   <a:srgbClr val="AEB7B9"/>
                 </a:solidFill>
@@ -7440,7 +7569,7 @@
               </a:rPr>
               <a:t>fluxo · destinação · integração</a:t>
             </a:r>
-            <a:endParaRPr lang="en-US" sz="950" dirty="0"/>
+            <a:endParaRPr lang="en-US" sz="1100" dirty="0"/>
           </a:p>
         </p:txBody>
       </p:sp>
@@ -7499,7 +7628,7 @@
         <p:spPr>
           <a:xfrm>
             <a:off x="1060704" y="4727448"/>
-            <a:ext cx="365760" cy="201168"/>
+            <a:ext cx="365760" cy="237744"/>
           </a:xfrm>
           <a:prstGeom prst="rect">
             <a:avLst/>
@@ -7576,8 +7705,8 @@
         </p:nvSpPr>
         <p:spPr>
           <a:xfrm>
-            <a:off x="3675888" y="4727448"/>
-            <a:ext cx="2377440" cy="201168"/>
+            <a:off x="3675888" y="4718304"/>
+            <a:ext cx="3017520" cy="237744"/>
           </a:xfrm>
           <a:prstGeom prst="rect">
             <a:avLst/>
@@ -7593,7 +7722,7 @@
               <a:buNone/>
             </a:pPr>
             <a:r>
-              <a:rPr lang="en-US" sz="950" dirty="0">
+              <a:rPr lang="en-US" sz="1100" dirty="0">
                 <a:solidFill>
                   <a:srgbClr val="AEB7B9"/>
                 </a:solidFill>
@@ -7603,7 +7732,7 @@
               </a:rPr>
               <a:t>representativa · caracterização + teste</a:t>
             </a:r>
-            <a:endParaRPr lang="en-US" sz="950" dirty="0"/>
+            <a:endParaRPr lang="en-US" sz="1100" dirty="0"/>
           </a:p>
         </p:txBody>
       </p:sp>
@@ -7616,11 +7745,11 @@
         <p:spPr>
           <a:xfrm>
             <a:off x="6858000" y="2798064"/>
-            <a:ext cx="4672584" cy="2395728"/>
+            <a:ext cx="4672584" cy="2487168"/>
           </a:xfrm>
           <a:prstGeom prst="roundRect">
             <a:avLst>
-              <a:gd name="adj" fmla="val 2290"/>
+              <a:gd name="adj" fmla="val 2206"/>
             </a:avLst>
           </a:prstGeom>
           <a:solidFill>
@@ -7689,8 +7818,8 @@
         </p:blipFill>
         <p:spPr>
           <a:xfrm>
-            <a:off x="7114032" y="3419856"/>
-            <a:ext cx="182880" cy="182880"/>
+            <a:off x="7114032" y="3438144"/>
+            <a:ext cx="201168" cy="201168"/>
           </a:xfrm>
           <a:prstGeom prst="rect">
             <a:avLst/>
@@ -7705,8 +7834,8 @@
         </p:nvSpPr>
         <p:spPr>
           <a:xfrm>
-            <a:off x="7424928" y="3447288"/>
-            <a:ext cx="3840480" cy="201168"/>
+            <a:off x="7443216" y="3465576"/>
+            <a:ext cx="3840480" cy="237744"/>
           </a:xfrm>
           <a:prstGeom prst="rect">
             <a:avLst/>
@@ -7722,7 +7851,7 @@
               <a:buNone/>
             </a:pPr>
             <a:r>
-              <a:rPr lang="en-US" sz="1050" dirty="0">
+              <a:rPr lang="en-US" sz="1150" dirty="0">
                 <a:solidFill>
                   <a:srgbClr val="F2EEE3"/>
                 </a:solidFill>
@@ -7732,7 +7861,7 @@
               </a:rPr>
               <a:t>balanço preliminar</a:t>
             </a:r>
-            <a:endParaRPr lang="en-US" sz="1050" dirty="0"/>
+            <a:endParaRPr lang="en-US" sz="1150" dirty="0"/>
           </a:p>
         </p:txBody>
       </p:sp>
@@ -7752,8 +7881,8 @@
         </p:blipFill>
         <p:spPr>
           <a:xfrm>
-            <a:off x="7114032" y="3767328"/>
-            <a:ext cx="182880" cy="182880"/>
+            <a:off x="7114032" y="3803904"/>
+            <a:ext cx="201168" cy="201168"/>
           </a:xfrm>
           <a:prstGeom prst="rect">
             <a:avLst/>
@@ -7768,8 +7897,8 @@
         </p:nvSpPr>
         <p:spPr>
           <a:xfrm>
-            <a:off x="7424928" y="3794760"/>
-            <a:ext cx="3840480" cy="201168"/>
+            <a:off x="7443216" y="3831336"/>
+            <a:ext cx="3840480" cy="237744"/>
           </a:xfrm>
           <a:prstGeom prst="rect">
             <a:avLst/>
@@ -7785,7 +7914,7 @@
               <a:buNone/>
             </a:pPr>
             <a:r>
-              <a:rPr lang="en-US" sz="1050" dirty="0">
+              <a:rPr lang="en-US" sz="1150" dirty="0">
                 <a:solidFill>
                   <a:srgbClr val="F2EEE3"/>
                 </a:solidFill>
@@ -7795,7 +7924,7 @@
               </a:rPr>
               <a:t>screening tecnológico</a:t>
             </a:r>
-            <a:endParaRPr lang="en-US" sz="1050" dirty="0"/>
+            <a:endParaRPr lang="en-US" sz="1150" dirty="0"/>
           </a:p>
         </p:txBody>
       </p:sp>
@@ -7815,8 +7944,8 @@
         </p:blipFill>
         <p:spPr>
           <a:xfrm>
-            <a:off x="7114032" y="4114800"/>
-            <a:ext cx="182880" cy="182880"/>
+            <a:off x="7114032" y="4169664"/>
+            <a:ext cx="201168" cy="201168"/>
           </a:xfrm>
           <a:prstGeom prst="rect">
             <a:avLst/>
@@ -7831,8 +7960,8 @@
         </p:nvSpPr>
         <p:spPr>
           <a:xfrm>
-            <a:off x="7424928" y="4142232"/>
-            <a:ext cx="3840480" cy="201168"/>
+            <a:off x="7443216" y="4197096"/>
+            <a:ext cx="3840480" cy="237744"/>
           </a:xfrm>
           <a:prstGeom prst="rect">
             <a:avLst/>
@@ -7848,7 +7977,7 @@
               <a:buNone/>
             </a:pPr>
             <a:r>
-              <a:rPr lang="en-US" sz="1050" dirty="0">
+              <a:rPr lang="en-US" sz="1150" dirty="0">
                 <a:solidFill>
                   <a:srgbClr val="F2EEE3"/>
                 </a:solidFill>
@@ -7858,7 +7987,7 @@
               </a:rPr>
               <a:t>rotas de uso do biochar</a:t>
             </a:r>
-            <a:endParaRPr lang="en-US" sz="1050" dirty="0"/>
+            <a:endParaRPr lang="en-US" sz="1150" dirty="0"/>
           </a:p>
         </p:txBody>
       </p:sp>
@@ -7878,8 +8007,8 @@
         </p:blipFill>
         <p:spPr>
           <a:xfrm>
-            <a:off x="7114032" y="4462272"/>
-            <a:ext cx="182880" cy="182880"/>
+            <a:off x="7114032" y="4535424"/>
+            <a:ext cx="201168" cy="201168"/>
           </a:xfrm>
           <a:prstGeom prst="rect">
             <a:avLst/>
@@ -7894,8 +8023,8 @@
         </p:nvSpPr>
         <p:spPr>
           <a:xfrm>
-            <a:off x="7424928" y="4489704"/>
-            <a:ext cx="3840480" cy="201168"/>
+            <a:off x="7443216" y="4562856"/>
+            <a:ext cx="3840480" cy="237744"/>
           </a:xfrm>
           <a:prstGeom prst="rect">
             <a:avLst/>
@@ -7911,7 +8040,7 @@
               <a:buNone/>
             </a:pPr>
             <a:r>
-              <a:rPr lang="en-US" sz="1050" dirty="0">
+              <a:rPr lang="en-US" sz="1150" dirty="0">
                 <a:solidFill>
                   <a:srgbClr val="F2EEE3"/>
                 </a:solidFill>
@@ -7921,7 +8050,7 @@
               </a:rPr>
               <a:t>faixa econômica</a:t>
             </a:r>
-            <a:endParaRPr lang="en-US" sz="1050" dirty="0"/>
+            <a:endParaRPr lang="en-US" sz="1150" dirty="0"/>
           </a:p>
         </p:txBody>
       </p:sp>
@@ -7941,8 +8070,8 @@
         </p:blipFill>
         <p:spPr>
           <a:xfrm>
-            <a:off x="7114032" y="4809744"/>
-            <a:ext cx="182880" cy="182880"/>
+            <a:off x="7114032" y="4901184"/>
+            <a:ext cx="201168" cy="201168"/>
           </a:xfrm>
           <a:prstGeom prst="rect">
             <a:avLst/>
@@ -7957,8 +8086,8 @@
         </p:nvSpPr>
         <p:spPr>
           <a:xfrm>
-            <a:off x="7424928" y="4837176"/>
-            <a:ext cx="3840480" cy="201168"/>
+            <a:off x="7443216" y="4928616"/>
+            <a:ext cx="3840480" cy="237744"/>
           </a:xfrm>
           <a:prstGeom prst="rect">
             <a:avLst/>
@@ -7974,7 +8103,7 @@
               <a:buNone/>
             </a:pPr>
             <a:r>
-              <a:rPr lang="en-US" sz="1050" dirty="0">
+              <a:rPr lang="en-US" sz="1150" dirty="0">
                 <a:solidFill>
                   <a:srgbClr val="F2EEE3"/>
                 </a:solidFill>
@@ -7984,7 +8113,7 @@
               </a:rPr>
               <a:t>recomendação de teste / piloto</a:t>
             </a:r>
-            <a:endParaRPr lang="en-US" sz="1050" dirty="0"/>
+            <a:endParaRPr lang="en-US" sz="1150" dirty="0"/>
           </a:p>
         </p:txBody>
       </p:sp>
@@ -8048,7 +8177,7 @@
                 <a:ea typeface="Arial" pitchFamily="34" charset="-122"/>
                 <a:cs typeface="Arial" pitchFamily="34" charset="-120"/>
               </a:rPr>
-              <a:t>Próximo passo proposto: agendar a sessão técnica com a unidade.</a:t>
+              <a:t>Próximo passo: apresentação da viabilidade do projeto.</a:t>
             </a:r>
             <a:endParaRPr lang="en-US" sz="1500" dirty="0"/>
           </a:p>

--- a/deck/proposta-pepsico-petrolina.pptx
+++ b/deck/proposta-pepsico-petrolina.pptx
@@ -860,7 +860,7 @@
           <a:p>
             <a:r>
               <a:rPr lang="en-US" dirty="0"/>
-              <a:t>A biomassa capturou CO₂ ao crescer; a pirólise estabiliza parte desse carbono no biochar, que é aplicado num uso elegível. As emissões do ciclo são medidas e descontadas do resultado.</a:t>
+              <a:t>O ciclo: a planta captura CO₂, a biomassa vira casca, a carbonização fixa o carbono no biochar e o biochar devolve esse carbono ao solo, onde a planta recomeça. Duas saídas laterais: energia recuperável da carbonização e certificado de CO₂ do biochar. As emissões do ciclo são medidas e descontadas.</a:t>
             </a:r>
             <a:endParaRPr lang="en-US" dirty="0"/>
           </a:p>
@@ -5595,8 +5595,8 @@
         </p:nvSpPr>
         <p:spPr>
           <a:xfrm>
-            <a:off x="5852160" y="1078992"/>
-            <a:ext cx="5669280" cy="726948"/>
+            <a:off x="658368" y="932688"/>
+            <a:ext cx="4937760" cy="807720"/>
           </a:xfrm>
           <a:prstGeom prst="rect">
             <a:avLst/>
@@ -5610,12 +5610,12 @@
           <a:p>
             <a:pPr indent="0" marL="0">
               <a:lnSpc>
-                <a:spcPts val="2862"/>
+                <a:spcPts val="3180"/>
               </a:lnSpc>
               <a:buNone/>
             </a:pPr>
             <a:r>
-              <a:rPr lang="en-US" sz="2700" b="1" spc="-120" kern="0" dirty="0">
+              <a:rPr lang="en-US" sz="3000" b="1" spc="-120" kern="0" dirty="0">
                 <a:solidFill>
                   <a:srgbClr val="FFFFFF"/>
                 </a:solidFill>
@@ -5623,19 +5623,19 @@
                 <a:ea typeface="Arial" pitchFamily="34" charset="-122"/>
                 <a:cs typeface="Arial" pitchFamily="34" charset="-120"/>
               </a:rPr>
-              <a:t>Biochar transforma carbono</a:t>
-            </a:r>
-            <a:endParaRPr lang="en-US" sz="2700" dirty="0"/>
+              <a:t>O carbono fecha</a:t>
+            </a:r>
+            <a:endParaRPr lang="en-US" sz="3000" dirty="0"/>
           </a:p>
           <a:p>
             <a:pPr indent="0" marL="0">
               <a:lnSpc>
-                <a:spcPts val="2862"/>
+                <a:spcPts val="3180"/>
               </a:lnSpc>
               <a:buNone/>
             </a:pPr>
             <a:r>
-              <a:rPr lang="en-US" sz="2700" b="1" spc="-120" kern="0" dirty="0">
+              <a:rPr lang="en-US" sz="3000" b="1" spc="-120" kern="0" dirty="0">
                 <a:solidFill>
                   <a:srgbClr val="FFFFFF"/>
                 </a:solidFill>
@@ -5643,9 +5643,9 @@
                 <a:ea typeface="Arial" pitchFamily="34" charset="-122"/>
                 <a:cs typeface="Arial" pitchFamily="34" charset="-120"/>
               </a:rPr>
-              <a:t>biogênico em produto durável.</a:t>
-            </a:r>
-            <a:endParaRPr lang="en-US" sz="2700" dirty="0"/>
+              <a:t>o ciclo.</a:t>
+            </a:r>
+            <a:endParaRPr lang="en-US" sz="3000" dirty="0"/>
           </a:p>
         </p:txBody>
       </p:sp>
@@ -5657,8 +5657,8 @@
         </p:nvSpPr>
         <p:spPr>
           <a:xfrm>
-            <a:off x="5852160" y="2286000"/>
-            <a:ext cx="5394960" cy="731520"/>
+            <a:off x="6309360" y="987552"/>
+            <a:ext cx="5212080" cy="822960"/>
           </a:xfrm>
           <a:prstGeom prst="rect">
             <a:avLst/>
@@ -5685,7 +5685,7 @@
                 <a:ea typeface="Arial" pitchFamily="34" charset="-122"/>
                 <a:cs typeface="Arial" pitchFamily="34" charset="-120"/>
               </a:rPr>
-              <a:t>A biomassa capturou CO₂ durante o crescimento. A pirólise estabiliza uma fração desse carbono no biochar.</a:t>
+              <a:t>A biomassa capturou CO₂ durante o crescimento. A pirólise estabiliza uma fração desse carbono no biochar, e o produto devolve esse carbono ao solo em forma estável.</a:t>
             </a:r>
             <a:endParaRPr lang="en-US" sz="1200" dirty="0"/>
           </a:p>
@@ -5693,32 +5693,85 @@
       </p:sp>
       <p:sp>
         <p:nvSpPr>
-          <p:cNvPr id="7" name="Shape 5"/>
-          <p:cNvSpPr/>
-          <p:nvPr/>
-        </p:nvSpPr>
-        <p:spPr>
-          <a:xfrm>
-            <a:off x="5852160" y="3163824"/>
-            <a:ext cx="475488" cy="475488"/>
-          </a:xfrm>
-          <a:prstGeom prst="ellipse">
-            <a:avLst/>
-          </a:prstGeom>
-          <a:solidFill>
-            <a:srgbClr val="1E3320"/>
-          </a:solidFill>
-          <a:ln w="12700">
-            <a:solidFill>
-              <a:srgbClr val="1E3320"/>
-            </a:solidFill>
-            <a:prstDash val="solid"/>
-          </a:ln>
-        </p:spPr>
+          <p:cNvPr id="7" name="Text 5"/>
+          <p:cNvSpPr txBox="1"/>
+          <p:nvPr/>
+        </p:nvSpPr>
+        <p:spPr>
+          <a:xfrm>
+            <a:off x="6309360" y="1920240"/>
+            <a:ext cx="5212080" cy="182880"/>
+          </a:xfrm>
+          <a:prstGeom prst="rect">
+            <a:avLst/>
+          </a:prstGeom>
+          <a:noFill/>
+          <a:ln/>
+        </p:spPr>
+        <p:txBody>
+          <a:bodyPr wrap="square" lIns="0" tIns="0" rIns="0" bIns="0" rtlCol="0" anchor="ctr"/>
+          <a:lstStyle/>
+          <a:p>
+            <a:pPr algn="l" indent="0" marL="0">
+              <a:buNone/>
+            </a:pPr>
+            <a:r>
+              <a:rPr lang="en-US" sz="850" spc="180" kern="0" dirty="0">
+                <a:solidFill>
+                  <a:srgbClr val="8FB04E"/>
+                </a:solidFill>
+                <a:latin typeface="Arial" pitchFamily="34" charset="0"/>
+                <a:ea typeface="Arial" pitchFamily="34" charset="-122"/>
+                <a:cs typeface="Arial" pitchFamily="34" charset="-120"/>
+              </a:rPr>
+              <a:t>EMISSÕES DO CICLO SÃO MEDIDAS E DESCONTADAS.</a:t>
+            </a:r>
+            <a:endParaRPr lang="en-US" sz="850" dirty="0"/>
+          </a:p>
+        </p:txBody>
+      </p:sp>
+      <p:sp>
+        <p:nvSpPr>
+          <p:cNvPr id="8" name="Text 6"/>
+          <p:cNvSpPr txBox="1"/>
+          <p:nvPr/>
+        </p:nvSpPr>
+        <p:spPr>
+          <a:xfrm>
+            <a:off x="3108960" y="2212848"/>
+            <a:ext cx="5943600" cy="182880"/>
+          </a:xfrm>
+          <a:prstGeom prst="rect">
+            <a:avLst/>
+          </a:prstGeom>
+          <a:noFill/>
+          <a:ln/>
+        </p:spPr>
+        <p:txBody>
+          <a:bodyPr wrap="square" lIns="0" tIns="0" rIns="0" bIns="0" rtlCol="0" anchor="ctr"/>
+          <a:lstStyle/>
+          <a:p>
+            <a:pPr algn="ctr" indent="0" marL="0">
+              <a:buNone/>
+            </a:pPr>
+            <a:r>
+              <a:rPr lang="en-US" sz="800" spc="180" kern="0" dirty="0">
+                <a:solidFill>
+                  <a:srgbClr val="AEB7B9"/>
+                </a:solidFill>
+                <a:latin typeface="Arial" pitchFamily="34" charset="0"/>
+                <a:ea typeface="Arial" pitchFamily="34" charset="-122"/>
+                <a:cs typeface="Arial" pitchFamily="34" charset="-120"/>
+              </a:rPr>
+              <a:t>O CARBONO VOLTA AO SOLO E À PLANTA</a:t>
+            </a:r>
+            <a:endParaRPr lang="en-US" sz="800" dirty="0"/>
+          </a:p>
+        </p:txBody>
       </p:sp>
       <p:pic>
         <p:nvPicPr>
-          <p:cNvPr id="8" name="Image 0" descr="/home/user/clipping/design-system/.preview/deck-assets/ico/muda-acid.png">    </p:cNvPr>
+          <p:cNvPr id="9" name="Image 0" descr="/home/user/clipping/design-system/.preview/deck-assets/ico/muda-steel.png">    </p:cNvPr>
           <p:cNvPicPr>
             <a:picLocks noChangeAspect="1"/>
           </p:cNvPicPr>
@@ -5732,8 +5785,8 @@
         </p:blipFill>
         <p:spPr>
           <a:xfrm>
-            <a:off x="5959145" y="3270809"/>
-            <a:ext cx="261518" cy="261518"/>
+            <a:off x="1152144" y="3803904"/>
+            <a:ext cx="475488" cy="475488"/>
           </a:xfrm>
           <a:prstGeom prst="rect">
             <a:avLst/>
@@ -5742,14 +5795,53 @@
       </p:pic>
       <p:sp>
         <p:nvSpPr>
-          <p:cNvPr id="9" name="Text 6"/>
-          <p:cNvSpPr txBox="1"/>
-          <p:nvPr/>
-        </p:nvSpPr>
-        <p:spPr>
-          <a:xfrm>
-            <a:off x="6492240" y="3236976"/>
-            <a:ext cx="457200" cy="237744"/>
+          <p:cNvPr id="10" name="Text 7"/>
+          <p:cNvSpPr txBox="1"/>
+          <p:nvPr/>
+        </p:nvSpPr>
+        <p:spPr>
+          <a:xfrm>
+            <a:off x="246888" y="3054096"/>
+            <a:ext cx="2286000" cy="274320"/>
+          </a:xfrm>
+          <a:prstGeom prst="rect">
+            <a:avLst/>
+          </a:prstGeom>
+          <a:noFill/>
+          <a:ln/>
+        </p:spPr>
+        <p:txBody>
+          <a:bodyPr wrap="square" lIns="0" tIns="0" rIns="0" bIns="0" rtlCol="0" anchor="b"/>
+          <a:lstStyle/>
+          <a:p>
+            <a:pPr algn="ctr" indent="0" marL="0">
+              <a:buNone/>
+            </a:pPr>
+            <a:r>
+              <a:rPr lang="en-US" sz="1300" b="1" spc="-20" kern="0" dirty="0">
+                <a:solidFill>
+                  <a:srgbClr val="FFFFFF"/>
+                </a:solidFill>
+                <a:latin typeface="Arial" pitchFamily="34" charset="0"/>
+                <a:ea typeface="Arial" pitchFamily="34" charset="-122"/>
+                <a:cs typeface="Arial" pitchFamily="34" charset="-120"/>
+              </a:rPr>
+              <a:t>Fotossíntese</a:t>
+            </a:r>
+            <a:endParaRPr lang="en-US" sz="1300" dirty="0"/>
+          </a:p>
+        </p:txBody>
+      </p:sp>
+      <p:sp>
+        <p:nvSpPr>
+          <p:cNvPr id="11" name="Text 8"/>
+          <p:cNvSpPr txBox="1"/>
+          <p:nvPr/>
+        </p:nvSpPr>
+        <p:spPr>
+          <a:xfrm>
+            <a:off x="2450592" y="3922776"/>
+            <a:ext cx="914400" cy="237744"/>
           </a:xfrm>
           <a:prstGeom prst="rect">
             <a:avLst/>
@@ -5761,89 +5853,11 @@
           <a:bodyPr wrap="square" lIns="0" tIns="0" rIns="0" bIns="0" rtlCol="0" anchor="ctr"/>
           <a:lstStyle/>
           <a:p>
-            <a:pPr algn="l" indent="0" marL="0">
-              <a:buNone/>
-            </a:pPr>
-            <a:r>
-              <a:rPr lang="en-US" sz="1050" dirty="0">
-                <a:solidFill>
-                  <a:srgbClr val="8FB04E"/>
-                </a:solidFill>
-                <a:latin typeface="Arial" pitchFamily="34" charset="0"/>
-                <a:ea typeface="Arial" pitchFamily="34" charset="-122"/>
-                <a:cs typeface="Arial" pitchFamily="34" charset="-120"/>
-              </a:rPr>
-              <a:t>01</a:t>
-            </a:r>
-            <a:endParaRPr lang="en-US" sz="1050" dirty="0"/>
-          </a:p>
-        </p:txBody>
-      </p:sp>
-      <p:sp>
-        <p:nvSpPr>
-          <p:cNvPr id="10" name="Text 7"/>
-          <p:cNvSpPr txBox="1"/>
-          <p:nvPr/>
-        </p:nvSpPr>
-        <p:spPr>
-          <a:xfrm>
-            <a:off x="6967728" y="3218688"/>
-            <a:ext cx="2103120" cy="256032"/>
-          </a:xfrm>
-          <a:prstGeom prst="rect">
-            <a:avLst/>
-          </a:prstGeom>
-          <a:noFill/>
-          <a:ln/>
-        </p:spPr>
-        <p:txBody>
-          <a:bodyPr wrap="square" lIns="0" tIns="0" rIns="0" bIns="0" rtlCol="0" anchor="t"/>
-          <a:lstStyle/>
-          <a:p>
-            <a:pPr indent="0" marL="0">
-              <a:buNone/>
-            </a:pPr>
-            <a:r>
-              <a:rPr lang="en-US" sz="1350" b="1" spc="-30" kern="0" dirty="0">
-                <a:solidFill>
-                  <a:srgbClr val="FFFFFF"/>
-                </a:solidFill>
-                <a:latin typeface="Arial" pitchFamily="34" charset="0"/>
-                <a:ea typeface="Arial" pitchFamily="34" charset="-122"/>
-                <a:cs typeface="Arial" pitchFamily="34" charset="-120"/>
-              </a:rPr>
-              <a:t>Biomassa</a:t>
-            </a:r>
-            <a:endParaRPr lang="en-US" sz="1350" dirty="0"/>
-          </a:p>
-        </p:txBody>
-      </p:sp>
-      <p:sp>
-        <p:nvSpPr>
-          <p:cNvPr id="11" name="Text 8"/>
-          <p:cNvSpPr txBox="1"/>
-          <p:nvPr/>
-        </p:nvSpPr>
-        <p:spPr>
-          <a:xfrm>
-            <a:off x="9144000" y="3236976"/>
-            <a:ext cx="2395728" cy="237744"/>
-          </a:xfrm>
-          <a:prstGeom prst="rect">
-            <a:avLst/>
-          </a:prstGeom>
-          <a:noFill/>
-          <a:ln/>
-        </p:spPr>
-        <p:txBody>
-          <a:bodyPr wrap="square" lIns="0" tIns="0" rIns="0" bIns="0" rtlCol="0" anchor="ctr"/>
-          <a:lstStyle/>
-          <a:p>
-            <a:pPr algn="l" indent="0" marL="0">
-              <a:buNone/>
-            </a:pPr>
-            <a:r>
-              <a:rPr lang="en-US" sz="1100" dirty="0">
+            <a:pPr algn="ctr" indent="0" marL="0">
+              <a:buNone/>
+            </a:pPr>
+            <a:r>
+              <a:rPr lang="en-US" sz="1100" b="1" dirty="0">
                 <a:solidFill>
                   <a:srgbClr val="AEB7B9"/>
                 </a:solidFill>
@@ -5851,62 +5865,15 @@
                 <a:ea typeface="Arial" pitchFamily="34" charset="-122"/>
                 <a:cs typeface="Arial" pitchFamily="34" charset="-120"/>
               </a:rPr>
-              <a:t>carbono de origem biogênica</a:t>
+              <a:t>CO₂</a:t>
             </a:r>
             <a:endParaRPr lang="en-US" sz="1100" dirty="0"/>
           </a:p>
         </p:txBody>
-      </p:sp>
-      <p:sp>
-        <p:nvSpPr>
-          <p:cNvPr id="12" name="Shape 9"/>
-          <p:cNvSpPr/>
-          <p:nvPr/>
-        </p:nvSpPr>
-        <p:spPr>
-          <a:xfrm>
-            <a:off x="5852160" y="3785616"/>
-            <a:ext cx="5669280" cy="10058"/>
-          </a:xfrm>
-          <a:prstGeom prst="rect">
-            <a:avLst/>
-          </a:prstGeom>
-          <a:solidFill>
-            <a:srgbClr val="AEB7B9">
-              <a:alpha val="20000"/>
-            </a:srgbClr>
-          </a:solidFill>
-          <a:ln/>
-        </p:spPr>
-      </p:sp>
-      <p:sp>
-        <p:nvSpPr>
-          <p:cNvPr id="13" name="Shape 10"/>
-          <p:cNvSpPr/>
-          <p:nvPr/>
-        </p:nvSpPr>
-        <p:spPr>
-          <a:xfrm>
-            <a:off x="5852160" y="3931920"/>
-            <a:ext cx="475488" cy="475488"/>
-          </a:xfrm>
-          <a:prstGeom prst="ellipse">
-            <a:avLst/>
-          </a:prstGeom>
-          <a:solidFill>
-            <a:srgbClr val="1E3320"/>
-          </a:solidFill>
-          <a:ln w="12700">
-            <a:solidFill>
-              <a:srgbClr val="1E3320"/>
-            </a:solidFill>
-            <a:prstDash val="solid"/>
-          </a:ln>
-        </p:spPr>
       </p:sp>
       <p:pic>
         <p:nvPicPr>
-          <p:cNvPr id="14" name="Image 1" descr="/home/user/clipping/design-system/.preview/deck-assets/ico/reator-acid.png">    </p:cNvPr>
+          <p:cNvPr id="12" name="Image 1" descr="/home/user/clipping/design-system/.preview/deck-assets/ico/coco-steel.png">    </p:cNvPr>
           <p:cNvPicPr>
             <a:picLocks noChangeAspect="1"/>
           </p:cNvPicPr>
@@ -5920,8 +5887,8 @@
         </p:blipFill>
         <p:spPr>
           <a:xfrm>
-            <a:off x="5959145" y="4038905"/>
-            <a:ext cx="261518" cy="261518"/>
+            <a:off x="4480560" y="3803904"/>
+            <a:ext cx="475488" cy="475488"/>
           </a:xfrm>
           <a:prstGeom prst="rect">
             <a:avLst/>
@@ -5930,69 +5897,30 @@
       </p:pic>
       <p:sp>
         <p:nvSpPr>
-          <p:cNvPr id="15" name="Text 11"/>
-          <p:cNvSpPr txBox="1"/>
-          <p:nvPr/>
-        </p:nvSpPr>
-        <p:spPr>
-          <a:xfrm>
-            <a:off x="6492240" y="4005072"/>
-            <a:ext cx="457200" cy="237744"/>
-          </a:xfrm>
-          <a:prstGeom prst="rect">
-            <a:avLst/>
-          </a:prstGeom>
-          <a:noFill/>
-          <a:ln/>
-        </p:spPr>
-        <p:txBody>
-          <a:bodyPr wrap="square" lIns="0" tIns="0" rIns="0" bIns="0" rtlCol="0" anchor="ctr"/>
-          <a:lstStyle/>
-          <a:p>
-            <a:pPr algn="l" indent="0" marL="0">
-              <a:buNone/>
-            </a:pPr>
-            <a:r>
-              <a:rPr lang="en-US" sz="1050" dirty="0">
-                <a:solidFill>
-                  <a:srgbClr val="8FB04E"/>
-                </a:solidFill>
-                <a:latin typeface="Arial" pitchFamily="34" charset="0"/>
-                <a:ea typeface="Arial" pitchFamily="34" charset="-122"/>
-                <a:cs typeface="Arial" pitchFamily="34" charset="-120"/>
-              </a:rPr>
-              <a:t>02</a:t>
-            </a:r>
-            <a:endParaRPr lang="en-US" sz="1050" dirty="0"/>
-          </a:p>
-        </p:txBody>
-      </p:sp>
-      <p:sp>
-        <p:nvSpPr>
-          <p:cNvPr id="16" name="Text 12"/>
-          <p:cNvSpPr txBox="1"/>
-          <p:nvPr/>
-        </p:nvSpPr>
-        <p:spPr>
-          <a:xfrm>
-            <a:off x="6967728" y="3986784"/>
-            <a:ext cx="2103120" cy="256032"/>
-          </a:xfrm>
-          <a:prstGeom prst="rect">
-            <a:avLst/>
-          </a:prstGeom>
-          <a:noFill/>
-          <a:ln/>
-        </p:spPr>
-        <p:txBody>
-          <a:bodyPr wrap="square" lIns="0" tIns="0" rIns="0" bIns="0" rtlCol="0" anchor="t"/>
-          <a:lstStyle/>
-          <a:p>
-            <a:pPr indent="0" marL="0">
-              <a:buNone/>
-            </a:pPr>
-            <a:r>
-              <a:rPr lang="en-US" sz="1350" b="1" spc="-30" kern="0" dirty="0">
+          <p:cNvPr id="13" name="Text 9"/>
+          <p:cNvSpPr txBox="1"/>
+          <p:nvPr/>
+        </p:nvSpPr>
+        <p:spPr>
+          <a:xfrm>
+            <a:off x="3575304" y="3054096"/>
+            <a:ext cx="2286000" cy="274320"/>
+          </a:xfrm>
+          <a:prstGeom prst="rect">
+            <a:avLst/>
+          </a:prstGeom>
+          <a:noFill/>
+          <a:ln/>
+        </p:spPr>
+        <p:txBody>
+          <a:bodyPr wrap="square" lIns="0" tIns="0" rIns="0" bIns="0" rtlCol="0" anchor="b"/>
+          <a:lstStyle/>
+          <a:p>
+            <a:pPr algn="ctr" indent="0" marL="0">
+              <a:buNone/>
+            </a:pPr>
+            <a:r>
+              <a:rPr lang="en-US" sz="1300" b="1" spc="-20" kern="0" dirty="0">
                 <a:solidFill>
                   <a:srgbClr val="FFFFFF"/>
                 </a:solidFill>
@@ -6000,101 +5928,15 @@
                 <a:ea typeface="Arial" pitchFamily="34" charset="-122"/>
                 <a:cs typeface="Arial" pitchFamily="34" charset="-120"/>
               </a:rPr>
-              <a:t>Pirólise</a:t>
-            </a:r>
-            <a:endParaRPr lang="en-US" sz="1350" dirty="0"/>
-          </a:p>
-        </p:txBody>
-      </p:sp>
-      <p:sp>
-        <p:nvSpPr>
-          <p:cNvPr id="17" name="Text 13"/>
-          <p:cNvSpPr txBox="1"/>
-          <p:nvPr/>
-        </p:nvSpPr>
-        <p:spPr>
-          <a:xfrm>
-            <a:off x="9144000" y="4005072"/>
-            <a:ext cx="2395728" cy="237744"/>
-          </a:xfrm>
-          <a:prstGeom prst="rect">
-            <a:avLst/>
-          </a:prstGeom>
-          <a:noFill/>
-          <a:ln/>
-        </p:spPr>
-        <p:txBody>
-          <a:bodyPr wrap="square" lIns="0" tIns="0" rIns="0" bIns="0" rtlCol="0" anchor="ctr"/>
-          <a:lstStyle/>
-          <a:p>
-            <a:pPr algn="l" indent="0" marL="0">
-              <a:buNone/>
-            </a:pPr>
-            <a:r>
-              <a:rPr lang="en-US" sz="1100" dirty="0">
-                <a:solidFill>
-                  <a:srgbClr val="AEB7B9"/>
-                </a:solidFill>
-                <a:latin typeface="Arial" pitchFamily="34" charset="0"/>
-                <a:ea typeface="Arial" pitchFamily="34" charset="-122"/>
-                <a:cs typeface="Arial" pitchFamily="34" charset="-120"/>
-              </a:rPr>
-              <a:t>conversão sob controle</a:t>
-            </a:r>
-            <a:endParaRPr lang="en-US" sz="1100" dirty="0"/>
-          </a:p>
-        </p:txBody>
-      </p:sp>
-      <p:sp>
-        <p:nvSpPr>
-          <p:cNvPr id="18" name="Shape 14"/>
-          <p:cNvSpPr/>
-          <p:nvPr/>
-        </p:nvSpPr>
-        <p:spPr>
-          <a:xfrm>
-            <a:off x="5852160" y="4553712"/>
-            <a:ext cx="5669280" cy="10058"/>
-          </a:xfrm>
-          <a:prstGeom prst="rect">
-            <a:avLst/>
-          </a:prstGeom>
-          <a:solidFill>
-            <a:srgbClr val="AEB7B9">
-              <a:alpha val="20000"/>
-            </a:srgbClr>
-          </a:solidFill>
-          <a:ln/>
-        </p:spPr>
-      </p:sp>
-      <p:sp>
-        <p:nvSpPr>
-          <p:cNvPr id="19" name="Shape 15"/>
-          <p:cNvSpPr/>
-          <p:nvPr/>
-        </p:nvSpPr>
-        <p:spPr>
-          <a:xfrm>
-            <a:off x="5852160" y="4700016"/>
-            <a:ext cx="475488" cy="475488"/>
-          </a:xfrm>
-          <a:prstGeom prst="ellipse">
-            <a:avLst/>
-          </a:prstGeom>
-          <a:solidFill>
-            <a:srgbClr val="1E3320"/>
-          </a:solidFill>
-          <a:ln w="12700">
-            <a:solidFill>
-              <a:srgbClr val="1E3320"/>
-            </a:solidFill>
-            <a:prstDash val="solid"/>
-          </a:ln>
-        </p:spPr>
+              <a:t>Biomassa de coco</a:t>
+            </a:r>
+            <a:endParaRPr lang="en-US" sz="1300" dirty="0"/>
+          </a:p>
+        </p:txBody>
       </p:sp>
       <p:pic>
         <p:nvPicPr>
-          <p:cNvPr id="20" name="Image 2" descr="/home/user/clipping/design-system/.preview/deck-assets/ico/char-acid.png">    </p:cNvPr>
+          <p:cNvPr id="14" name="Image 2" descr="/home/user/clipping/design-system/.preview/deck-assets/ico/reator-steel.png">    </p:cNvPr>
           <p:cNvPicPr>
             <a:picLocks noChangeAspect="1"/>
           </p:cNvPicPr>
@@ -6108,8 +5950,8 @@
         </p:blipFill>
         <p:spPr>
           <a:xfrm>
-            <a:off x="5959145" y="4807001"/>
-            <a:ext cx="261518" cy="261518"/>
+            <a:off x="6949440" y="3803904"/>
+            <a:ext cx="475488" cy="475488"/>
           </a:xfrm>
           <a:prstGeom prst="rect">
             <a:avLst/>
@@ -6118,69 +5960,30 @@
       </p:pic>
       <p:sp>
         <p:nvSpPr>
-          <p:cNvPr id="21" name="Text 16"/>
-          <p:cNvSpPr txBox="1"/>
-          <p:nvPr/>
-        </p:nvSpPr>
-        <p:spPr>
-          <a:xfrm>
-            <a:off x="6492240" y="4773168"/>
-            <a:ext cx="457200" cy="237744"/>
-          </a:xfrm>
-          <a:prstGeom prst="rect">
-            <a:avLst/>
-          </a:prstGeom>
-          <a:noFill/>
-          <a:ln/>
-        </p:spPr>
-        <p:txBody>
-          <a:bodyPr wrap="square" lIns="0" tIns="0" rIns="0" bIns="0" rtlCol="0" anchor="ctr"/>
-          <a:lstStyle/>
-          <a:p>
-            <a:pPr algn="l" indent="0" marL="0">
-              <a:buNone/>
-            </a:pPr>
-            <a:r>
-              <a:rPr lang="en-US" sz="1050" dirty="0">
-                <a:solidFill>
-                  <a:srgbClr val="8FB04E"/>
-                </a:solidFill>
-                <a:latin typeface="Arial" pitchFamily="34" charset="0"/>
-                <a:ea typeface="Arial" pitchFamily="34" charset="-122"/>
-                <a:cs typeface="Arial" pitchFamily="34" charset="-120"/>
-              </a:rPr>
-              <a:t>03</a:t>
-            </a:r>
-            <a:endParaRPr lang="en-US" sz="1050" dirty="0"/>
-          </a:p>
-        </p:txBody>
-      </p:sp>
-      <p:sp>
-        <p:nvSpPr>
-          <p:cNvPr id="22" name="Text 17"/>
-          <p:cNvSpPr txBox="1"/>
-          <p:nvPr/>
-        </p:nvSpPr>
-        <p:spPr>
-          <a:xfrm>
-            <a:off x="6967728" y="4754880"/>
-            <a:ext cx="2103120" cy="256032"/>
-          </a:xfrm>
-          <a:prstGeom prst="rect">
-            <a:avLst/>
-          </a:prstGeom>
-          <a:noFill/>
-          <a:ln/>
-        </p:spPr>
-        <p:txBody>
-          <a:bodyPr wrap="square" lIns="0" tIns="0" rIns="0" bIns="0" rtlCol="0" anchor="t"/>
-          <a:lstStyle/>
-          <a:p>
-            <a:pPr indent="0" marL="0">
-              <a:buNone/>
-            </a:pPr>
-            <a:r>
-              <a:rPr lang="en-US" sz="1350" b="1" spc="-30" kern="0" dirty="0">
+          <p:cNvPr id="15" name="Text 10"/>
+          <p:cNvSpPr txBox="1"/>
+          <p:nvPr/>
+        </p:nvSpPr>
+        <p:spPr>
+          <a:xfrm>
+            <a:off x="6044184" y="3054096"/>
+            <a:ext cx="2286000" cy="274320"/>
+          </a:xfrm>
+          <a:prstGeom prst="rect">
+            <a:avLst/>
+          </a:prstGeom>
+          <a:noFill/>
+          <a:ln/>
+        </p:spPr>
+        <p:txBody>
+          <a:bodyPr wrap="square" lIns="0" tIns="0" rIns="0" bIns="0" rtlCol="0" anchor="b"/>
+          <a:lstStyle/>
+          <a:p>
+            <a:pPr algn="ctr" indent="0" marL="0">
+              <a:buNone/>
+            </a:pPr>
+            <a:r>
+              <a:rPr lang="en-US" sz="1300" b="1" spc="-20" kern="0" dirty="0">
                 <a:solidFill>
                   <a:srgbClr val="FFFFFF"/>
                 </a:solidFill>
@@ -6188,101 +5991,15 @@
                 <a:ea typeface="Arial" pitchFamily="34" charset="-122"/>
                 <a:cs typeface="Arial" pitchFamily="34" charset="-120"/>
               </a:rPr>
-              <a:t>Biochar</a:t>
-            </a:r>
-            <a:endParaRPr lang="en-US" sz="1350" dirty="0"/>
-          </a:p>
-        </p:txBody>
-      </p:sp>
-      <p:sp>
-        <p:nvSpPr>
-          <p:cNvPr id="23" name="Text 18"/>
-          <p:cNvSpPr txBox="1"/>
-          <p:nvPr/>
-        </p:nvSpPr>
-        <p:spPr>
-          <a:xfrm>
-            <a:off x="9144000" y="4773168"/>
-            <a:ext cx="2395728" cy="237744"/>
-          </a:xfrm>
-          <a:prstGeom prst="rect">
-            <a:avLst/>
-          </a:prstGeom>
-          <a:noFill/>
-          <a:ln/>
-        </p:spPr>
-        <p:txBody>
-          <a:bodyPr wrap="square" lIns="0" tIns="0" rIns="0" bIns="0" rtlCol="0" anchor="ctr"/>
-          <a:lstStyle/>
-          <a:p>
-            <a:pPr algn="l" indent="0" marL="0">
-              <a:buNone/>
-            </a:pPr>
-            <a:r>
-              <a:rPr lang="en-US" sz="1100" dirty="0">
-                <a:solidFill>
-                  <a:srgbClr val="AEB7B9"/>
-                </a:solidFill>
-                <a:latin typeface="Arial" pitchFamily="34" charset="0"/>
-                <a:ea typeface="Arial" pitchFamily="34" charset="-122"/>
-                <a:cs typeface="Arial" pitchFamily="34" charset="-120"/>
-              </a:rPr>
-              <a:t>carbono em material estável</a:t>
-            </a:r>
-            <a:endParaRPr lang="en-US" sz="1100" dirty="0"/>
-          </a:p>
-        </p:txBody>
-      </p:sp>
-      <p:sp>
-        <p:nvSpPr>
-          <p:cNvPr id="24" name="Shape 19"/>
-          <p:cNvSpPr/>
-          <p:nvPr/>
-        </p:nvSpPr>
-        <p:spPr>
-          <a:xfrm>
-            <a:off x="5852160" y="5321808"/>
-            <a:ext cx="5669280" cy="10058"/>
-          </a:xfrm>
-          <a:prstGeom prst="rect">
-            <a:avLst/>
-          </a:prstGeom>
-          <a:solidFill>
-            <a:srgbClr val="AEB7B9">
-              <a:alpha val="20000"/>
-            </a:srgbClr>
-          </a:solidFill>
-          <a:ln/>
-        </p:spPr>
-      </p:sp>
-      <p:sp>
-        <p:nvSpPr>
-          <p:cNvPr id="25" name="Shape 20"/>
-          <p:cNvSpPr/>
-          <p:nvPr/>
-        </p:nvSpPr>
-        <p:spPr>
-          <a:xfrm>
-            <a:off x="5852160" y="5468112"/>
-            <a:ext cx="475488" cy="475488"/>
-          </a:xfrm>
-          <a:prstGeom prst="ellipse">
-            <a:avLst/>
-          </a:prstGeom>
-          <a:solidFill>
-            <a:srgbClr val="8FB04E"/>
-          </a:solidFill>
-          <a:ln w="12700">
-            <a:solidFill>
-              <a:srgbClr val="8FB04E"/>
-            </a:solidFill>
-            <a:prstDash val="solid"/>
-          </a:ln>
-        </p:spPr>
+              <a:t>Carbonização</a:t>
+            </a:r>
+            <a:endParaRPr lang="en-US" sz="1300" dirty="0"/>
+          </a:p>
+        </p:txBody>
       </p:sp>
       <p:pic>
         <p:nvPicPr>
-          <p:cNvPr id="26" name="Image 3" descr="/home/user/clipping/design-system/.preview/deck-assets/ico/solo-dark.png">    </p:cNvPr>
+          <p:cNvPr id="16" name="Image 3" descr="/home/user/clipping/design-system/.preview/deck-assets/ico/char-acid.png">    </p:cNvPr>
           <p:cNvPicPr>
             <a:picLocks noChangeAspect="1"/>
           </p:cNvPicPr>
@@ -6296,8 +6013,8 @@
         </p:blipFill>
         <p:spPr>
           <a:xfrm>
-            <a:off x="5959145" y="5575097"/>
-            <a:ext cx="261518" cy="261518"/>
+            <a:off x="9418320" y="3803904"/>
+            <a:ext cx="475488" cy="475488"/>
           </a:xfrm>
           <a:prstGeom prst="rect">
             <a:avLst/>
@@ -6306,14 +6023,77 @@
       </p:pic>
       <p:sp>
         <p:nvSpPr>
-          <p:cNvPr id="27" name="Text 21"/>
-          <p:cNvSpPr txBox="1"/>
-          <p:nvPr/>
-        </p:nvSpPr>
-        <p:spPr>
-          <a:xfrm>
-            <a:off x="6492240" y="5541264"/>
-            <a:ext cx="457200" cy="237744"/>
+          <p:cNvPr id="17" name="Text 11"/>
+          <p:cNvSpPr txBox="1"/>
+          <p:nvPr/>
+        </p:nvSpPr>
+        <p:spPr>
+          <a:xfrm>
+            <a:off x="8513064" y="3054096"/>
+            <a:ext cx="2286000" cy="274320"/>
+          </a:xfrm>
+          <a:prstGeom prst="rect">
+            <a:avLst/>
+          </a:prstGeom>
+          <a:noFill/>
+          <a:ln/>
+        </p:spPr>
+        <p:txBody>
+          <a:bodyPr wrap="square" lIns="0" tIns="0" rIns="0" bIns="0" rtlCol="0" anchor="b"/>
+          <a:lstStyle/>
+          <a:p>
+            <a:pPr algn="ctr" indent="0" marL="0">
+              <a:buNone/>
+            </a:pPr>
+            <a:r>
+              <a:rPr lang="en-US" sz="1300" b="1" spc="-20" kern="0" dirty="0">
+                <a:solidFill>
+                  <a:srgbClr val="8FB04E"/>
+                </a:solidFill>
+                <a:latin typeface="Arial" pitchFamily="34" charset="0"/>
+                <a:ea typeface="Arial" pitchFamily="34" charset="-122"/>
+                <a:cs typeface="Arial" pitchFamily="34" charset="-120"/>
+              </a:rPr>
+              <a:t>Biochar</a:t>
+            </a:r>
+            <a:endParaRPr lang="en-US" sz="1300" dirty="0"/>
+          </a:p>
+        </p:txBody>
+      </p:sp>
+      <p:pic>
+        <p:nvPicPr>
+          <p:cNvPr id="18" name="Image 4" descr="/home/user/clipping/design-system/.preview/deck-assets/ico/calor-acid.png">    </p:cNvPr>
+          <p:cNvPicPr>
+            <a:picLocks noChangeAspect="1"/>
+          </p:cNvPicPr>
+          <p:nvPr/>
+        </p:nvPicPr>
+        <p:blipFill>
+          <a:blip r:embed="rId6"/>
+          <a:stretch>
+            <a:fillRect/>
+          </a:stretch>
+        </p:blipFill>
+        <p:spPr>
+          <a:xfrm>
+            <a:off x="7013448" y="5532120"/>
+            <a:ext cx="347472" cy="347472"/>
+          </a:xfrm>
+          <a:prstGeom prst="rect">
+            <a:avLst/>
+          </a:prstGeom>
+        </p:spPr>
+      </p:pic>
+      <p:sp>
+        <p:nvSpPr>
+          <p:cNvPr id="19" name="Text 12"/>
+          <p:cNvSpPr txBox="1"/>
+          <p:nvPr/>
+        </p:nvSpPr>
+        <p:spPr>
+          <a:xfrm>
+            <a:off x="6272784" y="6163056"/>
+            <a:ext cx="1828800" cy="182880"/>
           </a:xfrm>
           <a:prstGeom prst="rect">
             <a:avLst/>
@@ -6325,11 +6105,11 @@
           <a:bodyPr wrap="square" lIns="0" tIns="0" rIns="0" bIns="0" rtlCol="0" anchor="ctr"/>
           <a:lstStyle/>
           <a:p>
-            <a:pPr algn="l" indent="0" marL="0">
-              <a:buNone/>
-            </a:pPr>
-            <a:r>
-              <a:rPr lang="en-US" sz="1050" dirty="0">
+            <a:pPr algn="ctr" indent="0" marL="0">
+              <a:buNone/>
+            </a:pPr>
+            <a:r>
+              <a:rPr lang="en-US" sz="750" spc="180" kern="0" dirty="0">
                 <a:solidFill>
                   <a:srgbClr val="8FB04E"/>
                 </a:solidFill>
@@ -6337,22 +6117,22 @@
                 <a:ea typeface="Arial" pitchFamily="34" charset="-122"/>
                 <a:cs typeface="Arial" pitchFamily="34" charset="-120"/>
               </a:rPr>
-              <a:t>04</a:t>
-            </a:r>
-            <a:endParaRPr lang="en-US" sz="1050" dirty="0"/>
-          </a:p>
-        </p:txBody>
-      </p:sp>
-      <p:sp>
-        <p:nvSpPr>
-          <p:cNvPr id="28" name="Text 22"/>
-          <p:cNvSpPr txBox="1"/>
-          <p:nvPr/>
-        </p:nvSpPr>
-        <p:spPr>
-          <a:xfrm>
-            <a:off x="6967728" y="5522976"/>
-            <a:ext cx="2103120" cy="256032"/>
+              <a:t>SAÍDA</a:t>
+            </a:r>
+            <a:endParaRPr lang="en-US" sz="750" dirty="0"/>
+          </a:p>
+        </p:txBody>
+      </p:sp>
+      <p:sp>
+        <p:nvSpPr>
+          <p:cNvPr id="20" name="Text 13"/>
+          <p:cNvSpPr txBox="1"/>
+          <p:nvPr/>
+        </p:nvSpPr>
+        <p:spPr>
+          <a:xfrm>
+            <a:off x="5907024" y="6345936"/>
+            <a:ext cx="2560320" cy="256032"/>
           </a:xfrm>
           <a:prstGeom prst="rect">
             <a:avLst/>
@@ -6364,34 +6144,58 @@
           <a:bodyPr wrap="square" lIns="0" tIns="0" rIns="0" bIns="0" rtlCol="0" anchor="t"/>
           <a:lstStyle/>
           <a:p>
-            <a:pPr indent="0" marL="0">
-              <a:buNone/>
-            </a:pPr>
-            <a:r>
-              <a:rPr lang="en-US" sz="1350" b="1" spc="-30" kern="0" dirty="0">
-                <a:solidFill>
-                  <a:srgbClr val="FFFFFF"/>
-                </a:solidFill>
-                <a:latin typeface="Arial" pitchFamily="34" charset="0"/>
-                <a:ea typeface="Arial" pitchFamily="34" charset="-122"/>
-                <a:cs typeface="Arial" pitchFamily="34" charset="-120"/>
-              </a:rPr>
-              <a:t>Uso elegível</a:t>
-            </a:r>
-            <a:endParaRPr lang="en-US" sz="1350" dirty="0"/>
-          </a:p>
-        </p:txBody>
-      </p:sp>
-      <p:sp>
-        <p:nvSpPr>
-          <p:cNvPr id="29" name="Text 23"/>
-          <p:cNvSpPr txBox="1"/>
-          <p:nvPr/>
-        </p:nvSpPr>
-        <p:spPr>
-          <a:xfrm>
-            <a:off x="9144000" y="5541264"/>
-            <a:ext cx="2395728" cy="237744"/>
+            <a:pPr algn="ctr" indent="0" marL="0">
+              <a:buNone/>
+            </a:pPr>
+            <a:r>
+              <a:rPr lang="en-US" sz="1200" b="1" spc="-20" kern="0" dirty="0">
+                <a:solidFill>
+                  <a:srgbClr val="F2EEE3"/>
+                </a:solidFill>
+                <a:latin typeface="Arial" pitchFamily="34" charset="0"/>
+                <a:ea typeface="Arial" pitchFamily="34" charset="-122"/>
+                <a:cs typeface="Arial" pitchFamily="34" charset="-120"/>
+              </a:rPr>
+              <a:t>Energia recuperável</a:t>
+            </a:r>
+            <a:endParaRPr lang="en-US" sz="1200" dirty="0"/>
+          </a:p>
+        </p:txBody>
+      </p:sp>
+      <p:pic>
+        <p:nvPicPr>
+          <p:cNvPr id="21" name="Image 5" descr="/home/user/clipping/design-system/.preview/deck-assets/ico/registro-acid.png">    </p:cNvPr>
+          <p:cNvPicPr>
+            <a:picLocks noChangeAspect="1"/>
+          </p:cNvPicPr>
+          <p:nvPr/>
+        </p:nvPicPr>
+        <p:blipFill>
+          <a:blip r:embed="rId7"/>
+          <a:stretch>
+            <a:fillRect/>
+          </a:stretch>
+        </p:blipFill>
+        <p:spPr>
+          <a:xfrm>
+            <a:off x="9482328" y="5532120"/>
+            <a:ext cx="347472" cy="347472"/>
+          </a:xfrm>
+          <a:prstGeom prst="rect">
+            <a:avLst/>
+          </a:prstGeom>
+        </p:spPr>
+      </p:pic>
+      <p:sp>
+        <p:nvSpPr>
+          <p:cNvPr id="22" name="Text 14"/>
+          <p:cNvSpPr txBox="1"/>
+          <p:nvPr/>
+        </p:nvSpPr>
+        <p:spPr>
+          <a:xfrm>
+            <a:off x="8741664" y="6163056"/>
+            <a:ext cx="1828800" cy="182880"/>
           </a:xfrm>
           <a:prstGeom prst="rect">
             <a:avLst/>
@@ -6403,50 +6207,11 @@
           <a:bodyPr wrap="square" lIns="0" tIns="0" rIns="0" bIns="0" rtlCol="0" anchor="ctr"/>
           <a:lstStyle/>
           <a:p>
-            <a:pPr algn="l" indent="0" marL="0">
-              <a:buNone/>
-            </a:pPr>
-            <a:r>
-              <a:rPr lang="en-US" sz="1100" dirty="0">
-                <a:solidFill>
-                  <a:srgbClr val="AEB7B9"/>
-                </a:solidFill>
-                <a:latin typeface="Arial" pitchFamily="34" charset="0"/>
-                <a:ea typeface="Arial" pitchFamily="34" charset="-122"/>
-                <a:cs typeface="Arial" pitchFamily="34" charset="-120"/>
-              </a:rPr>
-              <a:t>armazenamento de longa duração</a:t>
-            </a:r>
-            <a:endParaRPr lang="en-US" sz="1100" dirty="0"/>
-          </a:p>
-        </p:txBody>
-      </p:sp>
-      <p:sp>
-        <p:nvSpPr>
-          <p:cNvPr id="30" name="Text 24"/>
-          <p:cNvSpPr txBox="1"/>
-          <p:nvPr/>
-        </p:nvSpPr>
-        <p:spPr>
-          <a:xfrm>
-            <a:off x="5852160" y="6144768"/>
-            <a:ext cx="5669280" cy="182880"/>
-          </a:xfrm>
-          <a:prstGeom prst="rect">
-            <a:avLst/>
-          </a:prstGeom>
-          <a:noFill/>
-          <a:ln/>
-        </p:spPr>
-        <p:txBody>
-          <a:bodyPr wrap="square" lIns="0" tIns="0" rIns="0" bIns="0" rtlCol="0" anchor="ctr"/>
-          <a:lstStyle/>
-          <a:p>
-            <a:pPr algn="l" indent="0" marL="0">
-              <a:buNone/>
-            </a:pPr>
-            <a:r>
-              <a:rPr lang="en-US" sz="850" spc="180" kern="0" dirty="0">
+            <a:pPr algn="ctr" indent="0" marL="0">
+              <a:buNone/>
+            </a:pPr>
+            <a:r>
+              <a:rPr lang="en-US" sz="750" spc="180" kern="0" dirty="0">
                 <a:solidFill>
                   <a:srgbClr val="8FB04E"/>
                 </a:solidFill>
@@ -6454,9 +6219,48 @@
                 <a:ea typeface="Arial" pitchFamily="34" charset="-122"/>
                 <a:cs typeface="Arial" pitchFamily="34" charset="-120"/>
               </a:rPr>
-              <a:t>EMISSÕES DO CICLO SÃO MEDIDAS E DESCONTADAS.</a:t>
-            </a:r>
-            <a:endParaRPr lang="en-US" sz="850" dirty="0"/>
+              <a:t>SAÍDA</a:t>
+            </a:r>
+            <a:endParaRPr lang="en-US" sz="750" dirty="0"/>
+          </a:p>
+        </p:txBody>
+      </p:sp>
+      <p:sp>
+        <p:nvSpPr>
+          <p:cNvPr id="23" name="Text 15"/>
+          <p:cNvSpPr txBox="1"/>
+          <p:nvPr/>
+        </p:nvSpPr>
+        <p:spPr>
+          <a:xfrm>
+            <a:off x="8375904" y="6345936"/>
+            <a:ext cx="2560320" cy="256032"/>
+          </a:xfrm>
+          <a:prstGeom prst="rect">
+            <a:avLst/>
+          </a:prstGeom>
+          <a:noFill/>
+          <a:ln/>
+        </p:spPr>
+        <p:txBody>
+          <a:bodyPr wrap="square" lIns="0" tIns="0" rIns="0" bIns="0" rtlCol="0" anchor="t"/>
+          <a:lstStyle/>
+          <a:p>
+            <a:pPr algn="ctr" indent="0" marL="0">
+              <a:buNone/>
+            </a:pPr>
+            <a:r>
+              <a:rPr lang="en-US" sz="1200" b="1" spc="-20" kern="0" dirty="0">
+                <a:solidFill>
+                  <a:srgbClr val="F2EEE3"/>
+                </a:solidFill>
+                <a:latin typeface="Arial" pitchFamily="34" charset="0"/>
+                <a:ea typeface="Arial" pitchFamily="34" charset="-122"/>
+                <a:cs typeface="Arial" pitchFamily="34" charset="-120"/>
+              </a:rPr>
+              <a:t>Certificado de CO₂</a:t>
+            </a:r>
+            <a:endParaRPr lang="en-US" sz="1200" dirty="0"/>
           </a:p>
         </p:txBody>
       </p:sp>
@@ -6714,7 +6518,7 @@
                 <a:ea typeface="Arial" pitchFamily="34" charset="-122"/>
                 <a:cs typeface="Arial" pitchFamily="34" charset="-120"/>
               </a:rPr>
-              <a:t>O dimensionamento começa pelo fluxo real de Petrolina.</a:t>
+              <a:t>Para modelar o projeto, o primeiro dado é a disponibilidade de biomassa na unidade: quanto, com que regularidade e em que condição.</a:t>
             </a:r>
             <a:endParaRPr lang="en-US" sz="1200" dirty="0"/>
           </a:p>
@@ -6816,7 +6620,7 @@
                 <a:ea typeface="Arial" pitchFamily="34" charset="-122"/>
                 <a:cs typeface="Arial" pitchFamily="34" charset="-120"/>
               </a:rPr>
-              <a:t>Volume + sazonalidade</a:t>
+              <a:t>Disponibilidade de biomassa</a:t>
             </a:r>
             <a:endParaRPr lang="en-US" sz="1400" dirty="0"/>
           </a:p>
@@ -6855,7 +6659,7 @@
                 <a:ea typeface="Arial" pitchFamily="34" charset="-122"/>
                 <a:cs typeface="Arial" pitchFamily="34" charset="-120"/>
               </a:rPr>
-              <a:t>massa crítica e perfil de geração</a:t>
+              <a:t>volume, sazonalidade e perfil de geração</a:t>
             </a:r>
             <a:endParaRPr lang="en-US" sz="1100" dirty="0"/>
           </a:p>

--- a/deck/proposta-pepsico-petrolina.pptx
+++ b/deck/proposta-pepsico-petrolina.pptx
@@ -1607,8 +1607,8 @@
         </p:nvSpPr>
         <p:spPr>
           <a:xfrm>
-            <a:off x="658368" y="1773936"/>
-            <a:ext cx="6035040" cy="1776984"/>
+            <a:off x="658368" y="1645920"/>
+            <a:ext cx="6035040" cy="1507744"/>
           </a:xfrm>
           <a:prstGeom prst="rect">
             <a:avLst/>
@@ -1622,12 +1622,12 @@
           <a:p>
             <a:pPr indent="0" marL="0">
               <a:lnSpc>
-                <a:spcPts val="4664"/>
+                <a:spcPts val="5936"/>
               </a:lnSpc>
               <a:buNone/>
             </a:pPr>
             <a:r>
-              <a:rPr lang="en-US" sz="4400" b="1" spc="-120" kern="0" dirty="0">
+              <a:rPr lang="en-US" sz="5600" b="1" spc="-120" kern="0" dirty="0">
                 <a:solidFill>
                   <a:srgbClr val="FFFFFF"/>
                 </a:solidFill>
@@ -1635,19 +1635,19 @@
                 <a:ea typeface="Arial" pitchFamily="34" charset="-122"/>
                 <a:cs typeface="Arial" pitchFamily="34" charset="-120"/>
               </a:rPr>
-              <a:t>A biomassa de coco</a:t>
-            </a:r>
-            <a:endParaRPr lang="en-US" sz="4400" dirty="0"/>
+              <a:t>Um novo ativo</a:t>
+            </a:r>
+            <a:endParaRPr lang="en-US" sz="5600" dirty="0"/>
           </a:p>
           <a:p>
             <a:pPr indent="0" marL="0">
               <a:lnSpc>
-                <a:spcPts val="4664"/>
+                <a:spcPts val="5936"/>
               </a:lnSpc>
               <a:buNone/>
             </a:pPr>
             <a:r>
-              <a:rPr lang="en-US" sz="4400" b="1" spc="-120" kern="0" dirty="0">
+              <a:rPr lang="en-US" sz="5600" b="1" spc="-120" kern="0" dirty="0">
                 <a:solidFill>
                   <a:srgbClr val="FFFFFF"/>
                 </a:solidFill>
@@ -1655,29 +1655,9 @@
                 <a:ea typeface="Arial" pitchFamily="34" charset="-122"/>
                 <a:cs typeface="Arial" pitchFamily="34" charset="-120"/>
               </a:rPr>
-              <a:t>pode se tornar um</a:t>
-            </a:r>
-            <a:endParaRPr lang="en-US" sz="4400" dirty="0"/>
-          </a:p>
-          <a:p>
-            <a:pPr indent="0" marL="0">
-              <a:lnSpc>
-                <a:spcPts val="4664"/>
-              </a:lnSpc>
-              <a:buNone/>
-            </a:pPr>
-            <a:r>
-              <a:rPr lang="en-US" sz="4400" b="1" spc="-120" kern="0" dirty="0">
-                <a:solidFill>
-                  <a:srgbClr val="FFFFFF"/>
-                </a:solidFill>
-                <a:latin typeface="Arial" pitchFamily="34" charset="0"/>
-                <a:ea typeface="Arial" pitchFamily="34" charset="-122"/>
-                <a:cs typeface="Arial" pitchFamily="34" charset="-120"/>
-              </a:rPr>
-              <a:t>novo ativo industrial.</a:t>
-            </a:r>
-            <a:endParaRPr lang="en-US" sz="4400" dirty="0"/>
+              <a:t>industrial.</a:t>
+            </a:r>
+            <a:endParaRPr lang="en-US" sz="5600" dirty="0"/>
           </a:p>
         </p:txBody>
       </p:sp>
@@ -1689,7 +1669,7 @@
         </p:nvSpPr>
         <p:spPr>
           <a:xfrm>
-            <a:off x="658368" y="3986784"/>
+            <a:off x="658368" y="3310128"/>
             <a:ext cx="4937760" cy="822960"/>
           </a:xfrm>
           <a:prstGeom prst="rect">
@@ -1731,7 +1711,7 @@
         </p:nvSpPr>
         <p:spPr>
           <a:xfrm>
-            <a:off x="658368" y="5358384"/>
+            <a:off x="658368" y="4590288"/>
             <a:ext cx="4572000" cy="10058"/>
           </a:xfrm>
           <a:prstGeom prst="rect">
@@ -1753,7 +1733,7 @@
         </p:nvSpPr>
         <p:spPr>
           <a:xfrm>
-            <a:off x="658368" y="5541264"/>
+            <a:off x="658368" y="4773168"/>
             <a:ext cx="1371600" cy="182880"/>
           </a:xfrm>
           <a:prstGeom prst="rect">
@@ -1792,7 +1772,7 @@
         </p:nvSpPr>
         <p:spPr>
           <a:xfrm>
-            <a:off x="2121408" y="5541264"/>
+            <a:off x="2121408" y="4773168"/>
             <a:ext cx="1371600" cy="182880"/>
           </a:xfrm>
           <a:prstGeom prst="rect">
@@ -1831,7 +1811,7 @@
         </p:nvSpPr>
         <p:spPr>
           <a:xfrm>
-            <a:off x="3584448" y="5541264"/>
+            <a:off x="3584448" y="4773168"/>
             <a:ext cx="1371600" cy="182880"/>
           </a:xfrm>
           <a:prstGeom prst="rect">
@@ -1857,6 +1837,45 @@
                 <a:cs typeface="Arial" pitchFamily="34" charset="-120"/>
               </a:rPr>
               <a:t>VALOR</a:t>
+            </a:r>
+            <a:endParaRPr lang="en-US" sz="900" dirty="0"/>
+          </a:p>
+        </p:txBody>
+      </p:sp>
+      <p:sp>
+        <p:nvSpPr>
+          <p:cNvPr id="13" name="Text 11"/>
+          <p:cNvSpPr txBox="1"/>
+          <p:nvPr/>
+        </p:nvSpPr>
+        <p:spPr>
+          <a:xfrm>
+            <a:off x="658368" y="5870448"/>
+            <a:ext cx="2743200" cy="237744"/>
+          </a:xfrm>
+          <a:prstGeom prst="rect">
+            <a:avLst/>
+          </a:prstGeom>
+          <a:noFill/>
+          <a:ln/>
+        </p:spPr>
+        <p:txBody>
+          <a:bodyPr wrap="square" lIns="0" tIns="0" rIns="0" bIns="0" rtlCol="0" anchor="ctr"/>
+          <a:lstStyle/>
+          <a:p>
+            <a:pPr algn="l" indent="0" marL="0">
+              <a:buNone/>
+            </a:pPr>
+            <a:r>
+              <a:rPr lang="en-US" sz="900" dirty="0">
+                <a:solidFill>
+                  <a:srgbClr val="AEB7B9"/>
+                </a:solidFill>
+                <a:latin typeface="Arial" pitchFamily="34" charset="0"/>
+                <a:ea typeface="Arial" pitchFamily="34" charset="-122"/>
+                <a:cs typeface="Arial" pitchFamily="34" charset="-120"/>
+              </a:rPr>
+              <a:t>RECICLAR / EPA</a:t>
             </a:r>
             <a:endParaRPr lang="en-US" sz="900" dirty="0"/>
           </a:p>
@@ -2027,7 +2046,7 @@
         <p:spPr>
           <a:xfrm>
             <a:off x="658368" y="969264"/>
-            <a:ext cx="5577840" cy="807720"/>
+            <a:ext cx="5577840" cy="1076960"/>
           </a:xfrm>
           <a:prstGeom prst="rect">
             <a:avLst/>
@@ -2041,12 +2060,12 @@
           <a:p>
             <a:pPr indent="0" marL="0">
               <a:lnSpc>
-                <a:spcPts val="3180"/>
+                <a:spcPts val="4240"/>
               </a:lnSpc>
               <a:buNone/>
             </a:pPr>
             <a:r>
-              <a:rPr lang="en-US" sz="3000" b="1" spc="-120" kern="0" dirty="0">
+              <a:rPr lang="en-US" sz="4000" b="1" spc="-120" kern="0" dirty="0">
                 <a:solidFill>
                   <a:srgbClr val="FFFFFF"/>
                 </a:solidFill>
@@ -2054,19 +2073,19 @@
                 <a:ea typeface="Arial" pitchFamily="34" charset="-122"/>
                 <a:cs typeface="Arial" pitchFamily="34" charset="-120"/>
               </a:rPr>
-              <a:t>A pirólise concentra valor</a:t>
-            </a:r>
-            <a:endParaRPr lang="en-US" sz="3000" dirty="0"/>
+              <a:t>Pirólise</a:t>
+            </a:r>
+            <a:endParaRPr lang="en-US" sz="4000" dirty="0"/>
           </a:p>
           <a:p>
             <a:pPr indent="0" marL="0">
               <a:lnSpc>
-                <a:spcPts val="3180"/>
+                <a:spcPts val="4240"/>
               </a:lnSpc>
               <a:buNone/>
             </a:pPr>
             <a:r>
-              <a:rPr lang="en-US" sz="3000" b="1" spc="-120" kern="0" dirty="0">
+              <a:rPr lang="en-US" sz="4000" b="1" spc="-120" kern="0" dirty="0">
                 <a:solidFill>
                   <a:srgbClr val="FFFFFF"/>
                 </a:solidFill>
@@ -2074,9 +2093,9 @@
                 <a:ea typeface="Arial" pitchFamily="34" charset="-122"/>
                 <a:cs typeface="Arial" pitchFamily="34" charset="-120"/>
               </a:rPr>
-              <a:t>em um fluxo que já existe.</a:t>
-            </a:r>
-            <a:endParaRPr lang="en-US" sz="3000" dirty="0"/>
+              <a:t>concentra valor.</a:t>
+            </a:r>
+            <a:endParaRPr lang="en-US" sz="4000" dirty="0"/>
           </a:p>
         </p:txBody>
       </p:sp>
@@ -3446,8 +3465,8 @@
         </p:nvSpPr>
         <p:spPr>
           <a:xfrm>
-            <a:off x="5394960" y="969264"/>
-            <a:ext cx="6126480" cy="726948"/>
+            <a:off x="5394960" y="932688"/>
+            <a:ext cx="6126480" cy="1023112"/>
           </a:xfrm>
           <a:prstGeom prst="rect">
             <a:avLst/>
@@ -3461,12 +3480,12 @@
           <a:p>
             <a:pPr indent="0" marL="0">
               <a:lnSpc>
-                <a:spcPts val="2862"/>
+                <a:spcPts val="4028"/>
               </a:lnSpc>
               <a:buNone/>
             </a:pPr>
             <a:r>
-              <a:rPr lang="en-US" sz="2700" b="1" spc="-120" kern="0" dirty="0">
+              <a:rPr lang="en-US" sz="3800" b="1" spc="-120" kern="0" dirty="0">
                 <a:solidFill>
                   <a:srgbClr val="FFFFFF"/>
                 </a:solidFill>
@@ -3474,19 +3493,19 @@
                 <a:ea typeface="Arial" pitchFamily="34" charset="-122"/>
                 <a:cs typeface="Arial" pitchFamily="34" charset="-120"/>
               </a:rPr>
-              <a:t>A solução ganha eficiência</a:t>
-            </a:r>
-            <a:endParaRPr lang="en-US" sz="2700" dirty="0"/>
+              <a:t>Eficiência</a:t>
+            </a:r>
+            <a:endParaRPr lang="en-US" sz="3800" dirty="0"/>
           </a:p>
           <a:p>
             <a:pPr indent="0" marL="0">
               <a:lnSpc>
-                <a:spcPts val="2862"/>
+                <a:spcPts val="4028"/>
               </a:lnSpc>
               <a:buNone/>
             </a:pPr>
             <a:r>
-              <a:rPr lang="en-US" sz="2700" b="1" spc="-120" kern="0" dirty="0">
+              <a:rPr lang="en-US" sz="3800" b="1" spc="-120" kern="0" dirty="0">
                 <a:solidFill>
                   <a:srgbClr val="FFFFFF"/>
                 </a:solidFill>
@@ -3494,9 +3513,9 @@
                 <a:ea typeface="Arial" pitchFamily="34" charset="-122"/>
                 <a:cs typeface="Arial" pitchFamily="34" charset="-120"/>
               </a:rPr>
-              <a:t>quando nasce integrada à planta.</a:t>
-            </a:r>
-            <a:endParaRPr lang="en-US" sz="2700" dirty="0"/>
+              <a:t>pela integração.</a:t>
+            </a:r>
+            <a:endParaRPr lang="en-US" sz="3800" dirty="0"/>
           </a:p>
         </p:txBody>
       </p:sp>
@@ -4502,7 +4521,7 @@
         <p:spPr>
           <a:xfrm>
             <a:off x="658368" y="969264"/>
-            <a:ext cx="7315200" cy="861568"/>
+            <a:ext cx="7315200" cy="1076960"/>
           </a:xfrm>
           <a:prstGeom prst="rect">
             <a:avLst/>
@@ -4516,12 +4535,12 @@
           <a:p>
             <a:pPr indent="0" marL="0">
               <a:lnSpc>
-                <a:spcPts val="3392"/>
+                <a:spcPts val="4240"/>
               </a:lnSpc>
               <a:buNone/>
             </a:pPr>
             <a:r>
-              <a:rPr lang="en-US" sz="3200" b="1" spc="-120" kern="0" dirty="0">
+              <a:rPr lang="en-US" sz="4000" b="1" spc="-120" kern="0" dirty="0">
                 <a:solidFill>
                   <a:srgbClr val="1E3320"/>
                 </a:solidFill>
@@ -4529,19 +4548,19 @@
                 <a:ea typeface="Arial" pitchFamily="34" charset="-122"/>
                 <a:cs typeface="Arial" pitchFamily="34" charset="-120"/>
               </a:rPr>
-              <a:t>O business case combina</a:t>
-            </a:r>
-            <a:endParaRPr lang="en-US" sz="3200" dirty="0"/>
+              <a:t>Quatro alavancas</a:t>
+            </a:r>
+            <a:endParaRPr lang="en-US" sz="4000" dirty="0"/>
           </a:p>
           <a:p>
             <a:pPr indent="0" marL="0">
               <a:lnSpc>
-                <a:spcPts val="3392"/>
+                <a:spcPts val="4240"/>
               </a:lnSpc>
               <a:buNone/>
             </a:pPr>
             <a:r>
-              <a:rPr lang="en-US" sz="3200" b="1" spc="-120" kern="0" dirty="0">
+              <a:rPr lang="en-US" sz="4000" b="1" spc="-120" kern="0" dirty="0">
                 <a:solidFill>
                   <a:srgbClr val="1E3320"/>
                 </a:solidFill>
@@ -4549,9 +4568,9 @@
                 <a:ea typeface="Arial" pitchFamily="34" charset="-122"/>
                 <a:cs typeface="Arial" pitchFamily="34" charset="-120"/>
               </a:rPr>
-              <a:t>quatro alavancas de valor.</a:t>
-            </a:r>
-            <a:endParaRPr lang="en-US" sz="3200" dirty="0"/>
+              <a:t>de valor.</a:t>
+            </a:r>
+            <a:endParaRPr lang="en-US" sz="4000" dirty="0"/>
           </a:p>
         </p:txBody>
       </p:sp>
@@ -5596,7 +5615,7 @@
         <p:spPr>
           <a:xfrm>
             <a:off x="658368" y="932688"/>
-            <a:ext cx="4937760" cy="807720"/>
+            <a:ext cx="4937760" cy="1023112"/>
           </a:xfrm>
           <a:prstGeom prst="rect">
             <a:avLst/>
@@ -5610,12 +5629,12 @@
           <a:p>
             <a:pPr indent="0" marL="0">
               <a:lnSpc>
-                <a:spcPts val="3180"/>
+                <a:spcPts val="4028"/>
               </a:lnSpc>
               <a:buNone/>
             </a:pPr>
             <a:r>
-              <a:rPr lang="en-US" sz="3000" b="1" spc="-120" kern="0" dirty="0">
+              <a:rPr lang="en-US" sz="3800" b="1" spc="-120" kern="0" dirty="0">
                 <a:solidFill>
                   <a:srgbClr val="FFFFFF"/>
                 </a:solidFill>
@@ -5625,17 +5644,17 @@
               </a:rPr>
               <a:t>O carbono fecha</a:t>
             </a:r>
-            <a:endParaRPr lang="en-US" sz="3000" dirty="0"/>
+            <a:endParaRPr lang="en-US" sz="3800" dirty="0"/>
           </a:p>
           <a:p>
             <a:pPr indent="0" marL="0">
               <a:lnSpc>
-                <a:spcPts val="3180"/>
+                <a:spcPts val="4028"/>
               </a:lnSpc>
               <a:buNone/>
             </a:pPr>
             <a:r>
-              <a:rPr lang="en-US" sz="3000" b="1" spc="-120" kern="0" dirty="0">
+              <a:rPr lang="en-US" sz="3800" b="1" spc="-120" kern="0" dirty="0">
                 <a:solidFill>
                   <a:srgbClr val="FFFFFF"/>
                 </a:solidFill>
@@ -5645,7 +5664,7 @@
               </a:rPr>
               <a:t>o ciclo.</a:t>
             </a:r>
-            <a:endParaRPr lang="en-US" sz="3000" dirty="0"/>
+            <a:endParaRPr lang="en-US" sz="3800" dirty="0"/>
           </a:p>
         </p:txBody>
       </p:sp>
@@ -5657,7 +5676,7 @@
         </p:nvSpPr>
         <p:spPr>
           <a:xfrm>
-            <a:off x="6309360" y="987552"/>
+            <a:off x="6309360" y="969264"/>
             <a:ext cx="5212080" cy="822960"/>
           </a:xfrm>
           <a:prstGeom prst="rect">
@@ -5699,7 +5718,7 @@
         </p:nvSpPr>
         <p:spPr>
           <a:xfrm>
-            <a:off x="6309360" y="1920240"/>
+            <a:off x="6309360" y="1883664"/>
             <a:ext cx="5212080" cy="182880"/>
           </a:xfrm>
           <a:prstGeom prst="rect">
@@ -5727,51 +5746,12 @@
               <a:t>EMISSÕES DO CICLO SÃO MEDIDAS E DESCONTADAS.</a:t>
             </a:r>
             <a:endParaRPr lang="en-US" sz="850" dirty="0"/>
-          </a:p>
-        </p:txBody>
-      </p:sp>
-      <p:sp>
-        <p:nvSpPr>
-          <p:cNvPr id="8" name="Text 6"/>
-          <p:cNvSpPr txBox="1"/>
-          <p:nvPr/>
-        </p:nvSpPr>
-        <p:spPr>
-          <a:xfrm>
-            <a:off x="3108960" y="2212848"/>
-            <a:ext cx="5943600" cy="182880"/>
-          </a:xfrm>
-          <a:prstGeom prst="rect">
-            <a:avLst/>
-          </a:prstGeom>
-          <a:noFill/>
-          <a:ln/>
-        </p:spPr>
-        <p:txBody>
-          <a:bodyPr wrap="square" lIns="0" tIns="0" rIns="0" bIns="0" rtlCol="0" anchor="ctr"/>
-          <a:lstStyle/>
-          <a:p>
-            <a:pPr algn="ctr" indent="0" marL="0">
-              <a:buNone/>
-            </a:pPr>
-            <a:r>
-              <a:rPr lang="en-US" sz="800" spc="180" kern="0" dirty="0">
-                <a:solidFill>
-                  <a:srgbClr val="AEB7B9"/>
-                </a:solidFill>
-                <a:latin typeface="Arial" pitchFamily="34" charset="0"/>
-                <a:ea typeface="Arial" pitchFamily="34" charset="-122"/>
-                <a:cs typeface="Arial" pitchFamily="34" charset="-120"/>
-              </a:rPr>
-              <a:t>O CARBONO VOLTA AO SOLO E À PLANTA</a:t>
-            </a:r>
-            <a:endParaRPr lang="en-US" sz="800" dirty="0"/>
           </a:p>
         </p:txBody>
       </p:sp>
       <p:pic>
         <p:nvPicPr>
-          <p:cNvPr id="9" name="Image 0" descr="/home/user/clipping/design-system/.preview/deck-assets/ico/muda-steel.png">    </p:cNvPr>
+          <p:cNvPr id="8" name="Image 0" descr="/home/user/clipping/design-system/.preview/deck-assets/ciclo.gif">    </p:cNvPr>
           <p:cNvPicPr>
             <a:picLocks noChangeAspect="1"/>
           </p:cNvPicPr>
@@ -5785,8 +5765,8 @@
         </p:blipFill>
         <p:spPr>
           <a:xfrm>
-            <a:off x="1152144" y="3803904"/>
-            <a:ext cx="475488" cy="475488"/>
+            <a:off x="658368" y="2249424"/>
+            <a:ext cx="10872216" cy="4206240"/>
           </a:xfrm>
           <a:prstGeom prst="rect">
             <a:avLst/>
@@ -5795,69 +5775,30 @@
       </p:pic>
       <p:sp>
         <p:nvSpPr>
-          <p:cNvPr id="10" name="Text 7"/>
-          <p:cNvSpPr txBox="1"/>
-          <p:nvPr/>
-        </p:nvSpPr>
-        <p:spPr>
-          <a:xfrm>
-            <a:off x="246888" y="3054096"/>
-            <a:ext cx="2286000" cy="274320"/>
-          </a:xfrm>
-          <a:prstGeom prst="rect">
-            <a:avLst/>
-          </a:prstGeom>
-          <a:noFill/>
-          <a:ln/>
-        </p:spPr>
-        <p:txBody>
-          <a:bodyPr wrap="square" lIns="0" tIns="0" rIns="0" bIns="0" rtlCol="0" anchor="b"/>
+          <p:cNvPr id="9" name="Text 6"/>
+          <p:cNvSpPr txBox="1"/>
+          <p:nvPr/>
+        </p:nvSpPr>
+        <p:spPr>
+          <a:xfrm>
+            <a:off x="3108960" y="2212848"/>
+            <a:ext cx="5943600" cy="182880"/>
+          </a:xfrm>
+          <a:prstGeom prst="rect">
+            <a:avLst/>
+          </a:prstGeom>
+          <a:noFill/>
+          <a:ln/>
+        </p:spPr>
+        <p:txBody>
+          <a:bodyPr wrap="square" lIns="0" tIns="0" rIns="0" bIns="0" rtlCol="0" anchor="ctr"/>
           <a:lstStyle/>
           <a:p>
             <a:pPr algn="ctr" indent="0" marL="0">
               <a:buNone/>
             </a:pPr>
             <a:r>
-              <a:rPr lang="en-US" sz="1300" b="1" spc="-20" kern="0" dirty="0">
-                <a:solidFill>
-                  <a:srgbClr val="FFFFFF"/>
-                </a:solidFill>
-                <a:latin typeface="Arial" pitchFamily="34" charset="0"/>
-                <a:ea typeface="Arial" pitchFamily="34" charset="-122"/>
-                <a:cs typeface="Arial" pitchFamily="34" charset="-120"/>
-              </a:rPr>
-              <a:t>Fotossíntese</a:t>
-            </a:r>
-            <a:endParaRPr lang="en-US" sz="1300" dirty="0"/>
-          </a:p>
-        </p:txBody>
-      </p:sp>
-      <p:sp>
-        <p:nvSpPr>
-          <p:cNvPr id="11" name="Text 8"/>
-          <p:cNvSpPr txBox="1"/>
-          <p:nvPr/>
-        </p:nvSpPr>
-        <p:spPr>
-          <a:xfrm>
-            <a:off x="2450592" y="3922776"/>
-            <a:ext cx="914400" cy="237744"/>
-          </a:xfrm>
-          <a:prstGeom prst="rect">
-            <a:avLst/>
-          </a:prstGeom>
-          <a:noFill/>
-          <a:ln/>
-        </p:spPr>
-        <p:txBody>
-          <a:bodyPr wrap="square" lIns="0" tIns="0" rIns="0" bIns="0" rtlCol="0" anchor="ctr"/>
-          <a:lstStyle/>
-          <a:p>
-            <a:pPr algn="ctr" indent="0" marL="0">
-              <a:buNone/>
-            </a:pPr>
-            <a:r>
-              <a:rPr lang="en-US" sz="1100" b="1" dirty="0">
+              <a:rPr lang="en-US" sz="800" spc="180" kern="0" dirty="0">
                 <a:solidFill>
                   <a:srgbClr val="AEB7B9"/>
                 </a:solidFill>
@@ -5865,15 +5806,15 @@
                 <a:ea typeface="Arial" pitchFamily="34" charset="-122"/>
                 <a:cs typeface="Arial" pitchFamily="34" charset="-120"/>
               </a:rPr>
-              <a:t>CO₂</a:t>
-            </a:r>
-            <a:endParaRPr lang="en-US" sz="1100" dirty="0"/>
+              <a:t>O CARBONO VOLTA AO SOLO E À PLANTA</a:t>
+            </a:r>
+            <a:endParaRPr lang="en-US" sz="800" dirty="0"/>
           </a:p>
         </p:txBody>
       </p:sp>
       <p:pic>
         <p:nvPicPr>
-          <p:cNvPr id="12" name="Image 1" descr="/home/user/clipping/design-system/.preview/deck-assets/ico/coco-steel.png">    </p:cNvPr>
+          <p:cNvPr id="10" name="Image 1" descr="/home/user/clipping/design-system/.preview/deck-assets/ico/muda-steel.png">    </p:cNvPr>
           <p:cNvPicPr>
             <a:picLocks noChangeAspect="1"/>
           </p:cNvPicPr>
@@ -5887,7 +5828,7 @@
         </p:blipFill>
         <p:spPr>
           <a:xfrm>
-            <a:off x="4480560" y="3803904"/>
+            <a:off x="1152144" y="3803904"/>
             <a:ext cx="475488" cy="475488"/>
           </a:xfrm>
           <a:prstGeom prst="rect">
@@ -5897,13 +5838,13 @@
       </p:pic>
       <p:sp>
         <p:nvSpPr>
-          <p:cNvPr id="13" name="Text 9"/>
-          <p:cNvSpPr txBox="1"/>
-          <p:nvPr/>
-        </p:nvSpPr>
-        <p:spPr>
-          <a:xfrm>
-            <a:off x="3575304" y="3054096"/>
+          <p:cNvPr id="11" name="Text 7"/>
+          <p:cNvSpPr txBox="1"/>
+          <p:nvPr/>
+        </p:nvSpPr>
+        <p:spPr>
+          <a:xfrm>
+            <a:off x="246888" y="3054096"/>
             <a:ext cx="2286000" cy="274320"/>
           </a:xfrm>
           <a:prstGeom prst="rect">
@@ -5928,15 +5869,54 @@
                 <a:ea typeface="Arial" pitchFamily="34" charset="-122"/>
                 <a:cs typeface="Arial" pitchFamily="34" charset="-120"/>
               </a:rPr>
-              <a:t>Biomassa de coco</a:t>
+              <a:t>Fotossíntese</a:t>
             </a:r>
             <a:endParaRPr lang="en-US" sz="1300" dirty="0"/>
+          </a:p>
+        </p:txBody>
+      </p:sp>
+      <p:sp>
+        <p:nvSpPr>
+          <p:cNvPr id="12" name="Text 8"/>
+          <p:cNvSpPr txBox="1"/>
+          <p:nvPr/>
+        </p:nvSpPr>
+        <p:spPr>
+          <a:xfrm>
+            <a:off x="2450592" y="3922776"/>
+            <a:ext cx="914400" cy="237744"/>
+          </a:xfrm>
+          <a:prstGeom prst="rect">
+            <a:avLst/>
+          </a:prstGeom>
+          <a:noFill/>
+          <a:ln/>
+        </p:spPr>
+        <p:txBody>
+          <a:bodyPr wrap="square" lIns="0" tIns="0" rIns="0" bIns="0" rtlCol="0" anchor="ctr"/>
+          <a:lstStyle/>
+          <a:p>
+            <a:pPr algn="ctr" indent="0" marL="0">
+              <a:buNone/>
+            </a:pPr>
+            <a:r>
+              <a:rPr lang="en-US" sz="1100" b="1" dirty="0">
+                <a:solidFill>
+                  <a:srgbClr val="AEB7B9"/>
+                </a:solidFill>
+                <a:latin typeface="Arial" pitchFamily="34" charset="0"/>
+                <a:ea typeface="Arial" pitchFamily="34" charset="-122"/>
+                <a:cs typeface="Arial" pitchFamily="34" charset="-120"/>
+              </a:rPr>
+              <a:t>CO₂</a:t>
+            </a:r>
+            <a:endParaRPr lang="en-US" sz="1100" dirty="0"/>
           </a:p>
         </p:txBody>
       </p:sp>
       <p:pic>
         <p:nvPicPr>
-          <p:cNvPr id="14" name="Image 2" descr="/home/user/clipping/design-system/.preview/deck-assets/ico/reator-steel.png">    </p:cNvPr>
+          <p:cNvPr id="13" name="Image 2" descr="/home/user/clipping/design-system/.preview/deck-assets/ico/coco-steel.png">    </p:cNvPr>
           <p:cNvPicPr>
             <a:picLocks noChangeAspect="1"/>
           </p:cNvPicPr>
@@ -5950,7 +5930,7 @@
         </p:blipFill>
         <p:spPr>
           <a:xfrm>
-            <a:off x="6949440" y="3803904"/>
+            <a:off x="4480560" y="3803904"/>
             <a:ext cx="475488" cy="475488"/>
           </a:xfrm>
           <a:prstGeom prst="rect">
@@ -5960,13 +5940,13 @@
       </p:pic>
       <p:sp>
         <p:nvSpPr>
-          <p:cNvPr id="15" name="Text 10"/>
-          <p:cNvSpPr txBox="1"/>
-          <p:nvPr/>
-        </p:nvSpPr>
-        <p:spPr>
-          <a:xfrm>
-            <a:off x="6044184" y="3054096"/>
+          <p:cNvPr id="14" name="Text 9"/>
+          <p:cNvSpPr txBox="1"/>
+          <p:nvPr/>
+        </p:nvSpPr>
+        <p:spPr>
+          <a:xfrm>
+            <a:off x="3575304" y="3054096"/>
             <a:ext cx="2286000" cy="274320"/>
           </a:xfrm>
           <a:prstGeom prst="rect">
@@ -5991,7 +5971,7 @@
                 <a:ea typeface="Arial" pitchFamily="34" charset="-122"/>
                 <a:cs typeface="Arial" pitchFamily="34" charset="-120"/>
               </a:rPr>
-              <a:t>Carbonização</a:t>
+              <a:t>Biomassa de coco</a:t>
             </a:r>
             <a:endParaRPr lang="en-US" sz="1300" dirty="0"/>
           </a:p>
@@ -5999,7 +5979,7 @@
       </p:sp>
       <p:pic>
         <p:nvPicPr>
-          <p:cNvPr id="16" name="Image 3" descr="/home/user/clipping/design-system/.preview/deck-assets/ico/char-acid.png">    </p:cNvPr>
+          <p:cNvPr id="15" name="Image 3" descr="/home/user/clipping/design-system/.preview/deck-assets/ico/reator-steel.png">    </p:cNvPr>
           <p:cNvPicPr>
             <a:picLocks noChangeAspect="1"/>
           </p:cNvPicPr>
@@ -6013,7 +5993,7 @@
         </p:blipFill>
         <p:spPr>
           <a:xfrm>
-            <a:off x="9418320" y="3803904"/>
+            <a:off x="6949440" y="3803904"/>
             <a:ext cx="475488" cy="475488"/>
           </a:xfrm>
           <a:prstGeom prst="rect">
@@ -6023,13 +6003,13 @@
       </p:pic>
       <p:sp>
         <p:nvSpPr>
-          <p:cNvPr id="17" name="Text 11"/>
-          <p:cNvSpPr txBox="1"/>
-          <p:nvPr/>
-        </p:nvSpPr>
-        <p:spPr>
-          <a:xfrm>
-            <a:off x="8513064" y="3054096"/>
+          <p:cNvPr id="16" name="Text 10"/>
+          <p:cNvSpPr txBox="1"/>
+          <p:nvPr/>
+        </p:nvSpPr>
+        <p:spPr>
+          <a:xfrm>
+            <a:off x="6044184" y="3054096"/>
             <a:ext cx="2286000" cy="274320"/>
           </a:xfrm>
           <a:prstGeom prst="rect">
@@ -6048,13 +6028,13 @@
             <a:r>
               <a:rPr lang="en-US" sz="1300" b="1" spc="-20" kern="0" dirty="0">
                 <a:solidFill>
-                  <a:srgbClr val="8FB04E"/>
-                </a:solidFill>
-                <a:latin typeface="Arial" pitchFamily="34" charset="0"/>
-                <a:ea typeface="Arial" pitchFamily="34" charset="-122"/>
-                <a:cs typeface="Arial" pitchFamily="34" charset="-120"/>
-              </a:rPr>
-              <a:t>Biochar</a:t>
+                  <a:srgbClr val="FFFFFF"/>
+                </a:solidFill>
+                <a:latin typeface="Arial" pitchFamily="34" charset="0"/>
+                <a:ea typeface="Arial" pitchFamily="34" charset="-122"/>
+                <a:cs typeface="Arial" pitchFamily="34" charset="-120"/>
+              </a:rPr>
+              <a:t>Carbonização</a:t>
             </a:r>
             <a:endParaRPr lang="en-US" sz="1300" dirty="0"/>
           </a:p>
@@ -6062,7 +6042,7 @@
       </p:sp>
       <p:pic>
         <p:nvPicPr>
-          <p:cNvPr id="18" name="Image 4" descr="/home/user/clipping/design-system/.preview/deck-assets/ico/calor-acid.png">    </p:cNvPr>
+          <p:cNvPr id="17" name="Image 4" descr="/home/user/clipping/design-system/.preview/deck-assets/ico/char-acid.png">    </p:cNvPr>
           <p:cNvPicPr>
             <a:picLocks noChangeAspect="1"/>
           </p:cNvPicPr>
@@ -6076,8 +6056,8 @@
         </p:blipFill>
         <p:spPr>
           <a:xfrm>
-            <a:off x="7013448" y="5532120"/>
-            <a:ext cx="347472" cy="347472"/>
+            <a:off x="9418320" y="3803904"/>
+            <a:ext cx="475488" cy="475488"/>
           </a:xfrm>
           <a:prstGeom prst="rect">
             <a:avLst/>
@@ -6086,30 +6066,30 @@
       </p:pic>
       <p:sp>
         <p:nvSpPr>
-          <p:cNvPr id="19" name="Text 12"/>
-          <p:cNvSpPr txBox="1"/>
-          <p:nvPr/>
-        </p:nvSpPr>
-        <p:spPr>
-          <a:xfrm>
-            <a:off x="6272784" y="6163056"/>
-            <a:ext cx="1828800" cy="182880"/>
-          </a:xfrm>
-          <a:prstGeom prst="rect">
-            <a:avLst/>
-          </a:prstGeom>
-          <a:noFill/>
-          <a:ln/>
-        </p:spPr>
-        <p:txBody>
-          <a:bodyPr wrap="square" lIns="0" tIns="0" rIns="0" bIns="0" rtlCol="0" anchor="ctr"/>
+          <p:cNvPr id="18" name="Text 11"/>
+          <p:cNvSpPr txBox="1"/>
+          <p:nvPr/>
+        </p:nvSpPr>
+        <p:spPr>
+          <a:xfrm>
+            <a:off x="8513064" y="3054096"/>
+            <a:ext cx="2286000" cy="274320"/>
+          </a:xfrm>
+          <a:prstGeom prst="rect">
+            <a:avLst/>
+          </a:prstGeom>
+          <a:noFill/>
+          <a:ln/>
+        </p:spPr>
+        <p:txBody>
+          <a:bodyPr wrap="square" lIns="0" tIns="0" rIns="0" bIns="0" rtlCol="0" anchor="b"/>
           <a:lstStyle/>
           <a:p>
             <a:pPr algn="ctr" indent="0" marL="0">
               <a:buNone/>
             </a:pPr>
             <a:r>
-              <a:rPr lang="en-US" sz="750" spc="180" kern="0" dirty="0">
+              <a:rPr lang="en-US" sz="1300" b="1" spc="-20" kern="0" dirty="0">
                 <a:solidFill>
                   <a:srgbClr val="8FB04E"/>
                 </a:solidFill>
@@ -6117,54 +6097,15 @@
                 <a:ea typeface="Arial" pitchFamily="34" charset="-122"/>
                 <a:cs typeface="Arial" pitchFamily="34" charset="-120"/>
               </a:rPr>
-              <a:t>SAÍDA</a:t>
-            </a:r>
-            <a:endParaRPr lang="en-US" sz="750" dirty="0"/>
-          </a:p>
-        </p:txBody>
-      </p:sp>
-      <p:sp>
-        <p:nvSpPr>
-          <p:cNvPr id="20" name="Text 13"/>
-          <p:cNvSpPr txBox="1"/>
-          <p:nvPr/>
-        </p:nvSpPr>
-        <p:spPr>
-          <a:xfrm>
-            <a:off x="5907024" y="6345936"/>
-            <a:ext cx="2560320" cy="256032"/>
-          </a:xfrm>
-          <a:prstGeom prst="rect">
-            <a:avLst/>
-          </a:prstGeom>
-          <a:noFill/>
-          <a:ln/>
-        </p:spPr>
-        <p:txBody>
-          <a:bodyPr wrap="square" lIns="0" tIns="0" rIns="0" bIns="0" rtlCol="0" anchor="t"/>
-          <a:lstStyle/>
-          <a:p>
-            <a:pPr algn="ctr" indent="0" marL="0">
-              <a:buNone/>
-            </a:pPr>
-            <a:r>
-              <a:rPr lang="en-US" sz="1200" b="1" spc="-20" kern="0" dirty="0">
-                <a:solidFill>
-                  <a:srgbClr val="F2EEE3"/>
-                </a:solidFill>
-                <a:latin typeface="Arial" pitchFamily="34" charset="0"/>
-                <a:ea typeface="Arial" pitchFamily="34" charset="-122"/>
-                <a:cs typeface="Arial" pitchFamily="34" charset="-120"/>
-              </a:rPr>
-              <a:t>Energia recuperável</a:t>
-            </a:r>
-            <a:endParaRPr lang="en-US" sz="1200" dirty="0"/>
+              <a:t>Biochar</a:t>
+            </a:r>
+            <a:endParaRPr lang="en-US" sz="1300" dirty="0"/>
           </a:p>
         </p:txBody>
       </p:sp>
       <p:pic>
         <p:nvPicPr>
-          <p:cNvPr id="21" name="Image 5" descr="/home/user/clipping/design-system/.preview/deck-assets/ico/registro-acid.png">    </p:cNvPr>
+          <p:cNvPr id="19" name="Image 5" descr="/home/user/clipping/design-system/.preview/deck-assets/ico/calor-acid.png">    </p:cNvPr>
           <p:cNvPicPr>
             <a:picLocks noChangeAspect="1"/>
           </p:cNvPicPr>
@@ -6178,7 +6119,7 @@
         </p:blipFill>
         <p:spPr>
           <a:xfrm>
-            <a:off x="9482328" y="5532120"/>
+            <a:off x="7013448" y="5312664"/>
             <a:ext cx="347472" cy="347472"/>
           </a:xfrm>
           <a:prstGeom prst="rect">
@@ -6188,13 +6129,13 @@
       </p:pic>
       <p:sp>
         <p:nvSpPr>
-          <p:cNvPr id="22" name="Text 14"/>
-          <p:cNvSpPr txBox="1"/>
-          <p:nvPr/>
-        </p:nvSpPr>
-        <p:spPr>
-          <a:xfrm>
-            <a:off x="8741664" y="6163056"/>
+          <p:cNvPr id="20" name="Text 12"/>
+          <p:cNvSpPr txBox="1"/>
+          <p:nvPr/>
+        </p:nvSpPr>
+        <p:spPr>
+          <a:xfrm>
+            <a:off x="6272784" y="5925312"/>
             <a:ext cx="1828800" cy="182880"/>
           </a:xfrm>
           <a:prstGeom prst="rect">
@@ -6227,13 +6168,115 @@
       </p:sp>
       <p:sp>
         <p:nvSpPr>
-          <p:cNvPr id="23" name="Text 15"/>
-          <p:cNvSpPr txBox="1"/>
-          <p:nvPr/>
-        </p:nvSpPr>
-        <p:spPr>
-          <a:xfrm>
-            <a:off x="8375904" y="6345936"/>
+          <p:cNvPr id="21" name="Text 13"/>
+          <p:cNvSpPr txBox="1"/>
+          <p:nvPr/>
+        </p:nvSpPr>
+        <p:spPr>
+          <a:xfrm>
+            <a:off x="5907024" y="6108192"/>
+            <a:ext cx="2560320" cy="256032"/>
+          </a:xfrm>
+          <a:prstGeom prst="rect">
+            <a:avLst/>
+          </a:prstGeom>
+          <a:noFill/>
+          <a:ln/>
+        </p:spPr>
+        <p:txBody>
+          <a:bodyPr wrap="square" lIns="0" tIns="0" rIns="0" bIns="0" rtlCol="0" anchor="t"/>
+          <a:lstStyle/>
+          <a:p>
+            <a:pPr algn="ctr" indent="0" marL="0">
+              <a:buNone/>
+            </a:pPr>
+            <a:r>
+              <a:rPr lang="en-US" sz="1200" b="1" spc="-20" kern="0" dirty="0">
+                <a:solidFill>
+                  <a:srgbClr val="F2EEE3"/>
+                </a:solidFill>
+                <a:latin typeface="Arial" pitchFamily="34" charset="0"/>
+                <a:ea typeface="Arial" pitchFamily="34" charset="-122"/>
+                <a:cs typeface="Arial" pitchFamily="34" charset="-120"/>
+              </a:rPr>
+              <a:t>Energia recuperável</a:t>
+            </a:r>
+            <a:endParaRPr lang="en-US" sz="1200" dirty="0"/>
+          </a:p>
+        </p:txBody>
+      </p:sp>
+      <p:pic>
+        <p:nvPicPr>
+          <p:cNvPr id="22" name="Image 6" descr="/home/user/clipping/design-system/.preview/deck-assets/ico/registro-acid.png">    </p:cNvPr>
+          <p:cNvPicPr>
+            <a:picLocks noChangeAspect="1"/>
+          </p:cNvPicPr>
+          <p:nvPr/>
+        </p:nvPicPr>
+        <p:blipFill>
+          <a:blip r:embed="rId8"/>
+          <a:stretch>
+            <a:fillRect/>
+          </a:stretch>
+        </p:blipFill>
+        <p:spPr>
+          <a:xfrm>
+            <a:off x="9482328" y="5312664"/>
+            <a:ext cx="347472" cy="347472"/>
+          </a:xfrm>
+          <a:prstGeom prst="rect">
+            <a:avLst/>
+          </a:prstGeom>
+        </p:spPr>
+      </p:pic>
+      <p:sp>
+        <p:nvSpPr>
+          <p:cNvPr id="23" name="Text 14"/>
+          <p:cNvSpPr txBox="1"/>
+          <p:nvPr/>
+        </p:nvSpPr>
+        <p:spPr>
+          <a:xfrm>
+            <a:off x="8741664" y="5925312"/>
+            <a:ext cx="1828800" cy="182880"/>
+          </a:xfrm>
+          <a:prstGeom prst="rect">
+            <a:avLst/>
+          </a:prstGeom>
+          <a:noFill/>
+          <a:ln/>
+        </p:spPr>
+        <p:txBody>
+          <a:bodyPr wrap="square" lIns="0" tIns="0" rIns="0" bIns="0" rtlCol="0" anchor="ctr"/>
+          <a:lstStyle/>
+          <a:p>
+            <a:pPr algn="ctr" indent="0" marL="0">
+              <a:buNone/>
+            </a:pPr>
+            <a:r>
+              <a:rPr lang="en-US" sz="750" spc="180" kern="0" dirty="0">
+                <a:solidFill>
+                  <a:srgbClr val="8FB04E"/>
+                </a:solidFill>
+                <a:latin typeface="Arial" pitchFamily="34" charset="0"/>
+                <a:ea typeface="Arial" pitchFamily="34" charset="-122"/>
+                <a:cs typeface="Arial" pitchFamily="34" charset="-120"/>
+              </a:rPr>
+              <a:t>SAÍDA</a:t>
+            </a:r>
+            <a:endParaRPr lang="en-US" sz="750" dirty="0"/>
+          </a:p>
+        </p:txBody>
+      </p:sp>
+      <p:sp>
+        <p:nvSpPr>
+          <p:cNvPr id="24" name="Text 15"/>
+          <p:cNvSpPr txBox="1"/>
+          <p:nvPr/>
+        </p:nvSpPr>
+        <p:spPr>
+          <a:xfrm>
+            <a:off x="8375904" y="6108192"/>
             <a:ext cx="2560320" cy="256032"/>
           </a:xfrm>
           <a:prstGeom prst="rect">
@@ -6429,7 +6472,7 @@
         <p:spPr>
           <a:xfrm>
             <a:off x="658368" y="969264"/>
-            <a:ext cx="5669280" cy="807720"/>
+            <a:ext cx="5669280" cy="1076960"/>
           </a:xfrm>
           <a:prstGeom prst="rect">
             <a:avLst/>
@@ -6443,12 +6486,12 @@
           <a:p>
             <a:pPr indent="0" marL="0">
               <a:lnSpc>
-                <a:spcPts val="3180"/>
+                <a:spcPts val="4240"/>
               </a:lnSpc>
               <a:buNone/>
             </a:pPr>
             <a:r>
-              <a:rPr lang="en-US" sz="3000" b="1" spc="-120" kern="0" dirty="0">
+              <a:rPr lang="en-US" sz="4000" b="1" spc="-120" kern="0" dirty="0">
                 <a:solidFill>
                   <a:srgbClr val="1E3320"/>
                 </a:solidFill>
@@ -6456,19 +6499,19 @@
                 <a:ea typeface="Arial" pitchFamily="34" charset="-122"/>
                 <a:cs typeface="Arial" pitchFamily="34" charset="-120"/>
               </a:rPr>
-              <a:t>O projeto começa</a:t>
-            </a:r>
-            <a:endParaRPr lang="en-US" sz="3000" dirty="0"/>
+              <a:t>Quatro dados</a:t>
+            </a:r>
+            <a:endParaRPr lang="en-US" sz="4000" dirty="0"/>
           </a:p>
           <a:p>
             <a:pPr indent="0" marL="0">
               <a:lnSpc>
-                <a:spcPts val="3180"/>
+                <a:spcPts val="4240"/>
               </a:lnSpc>
               <a:buNone/>
             </a:pPr>
             <a:r>
-              <a:rPr lang="en-US" sz="3000" b="1" spc="-120" kern="0" dirty="0">
+              <a:rPr lang="en-US" sz="4000" b="1" spc="-120" kern="0" dirty="0">
                 <a:solidFill>
                   <a:srgbClr val="1E3320"/>
                 </a:solidFill>
@@ -6476,9 +6519,9 @@
                 <a:ea typeface="Arial" pitchFamily="34" charset="-122"/>
                 <a:cs typeface="Arial" pitchFamily="34" charset="-120"/>
               </a:rPr>
-              <a:t>com quatro dados.</a:t>
-            </a:r>
-            <a:endParaRPr lang="en-US" sz="3000" dirty="0"/>
+              <a:t>para modelar.</a:t>
+            </a:r>
+            <a:endParaRPr lang="en-US" sz="4000" dirty="0"/>
           </a:p>
         </p:txBody>
       </p:sp>
@@ -7385,7 +7428,7 @@
         <p:spPr>
           <a:xfrm>
             <a:off x="658368" y="969264"/>
-            <a:ext cx="6766560" cy="807720"/>
+            <a:ext cx="6766560" cy="1076960"/>
           </a:xfrm>
           <a:prstGeom prst="rect">
             <a:avLst/>
@@ -7399,12 +7442,12 @@
           <a:p>
             <a:pPr indent="0" marL="0">
               <a:lnSpc>
-                <a:spcPts val="3180"/>
+                <a:spcPts val="4240"/>
               </a:lnSpc>
               <a:buNone/>
             </a:pPr>
             <a:r>
-              <a:rPr lang="en-US" sz="3000" b="1" spc="-120" kern="0" dirty="0">
+              <a:rPr lang="en-US" sz="4000" b="1" spc="-120" kern="0" dirty="0">
                 <a:solidFill>
                   <a:srgbClr val="FFFFFF"/>
                 </a:solidFill>
@@ -7412,19 +7455,19 @@
                 <a:ea typeface="Arial" pitchFamily="34" charset="-122"/>
                 <a:cs typeface="Arial" pitchFamily="34" charset="-120"/>
               </a:rPr>
-              <a:t>Vamos construir o</a:t>
-            </a:r>
-            <a:endParaRPr lang="en-US" sz="3000" dirty="0"/>
+              <a:t>Construir o</a:t>
+            </a:r>
+            <a:endParaRPr lang="en-US" sz="4000" dirty="0"/>
           </a:p>
           <a:p>
             <a:pPr indent="0" marL="0">
               <a:lnSpc>
-                <a:spcPts val="3180"/>
+                <a:spcPts val="4240"/>
               </a:lnSpc>
               <a:buNone/>
             </a:pPr>
             <a:r>
-              <a:rPr lang="en-US" sz="3000" b="1" spc="-120" kern="0" dirty="0">
+              <a:rPr lang="en-US" sz="4000" b="1" spc="-120" kern="0" dirty="0">
                 <a:solidFill>
                   <a:srgbClr val="FFFFFF"/>
                 </a:solidFill>
@@ -7432,9 +7475,9 @@
                 <a:ea typeface="Arial" pitchFamily="34" charset="-122"/>
                 <a:cs typeface="Arial" pitchFamily="34" charset="-120"/>
               </a:rPr>
-              <a:t>business case de Petrolina.</a:t>
-            </a:r>
-            <a:endParaRPr lang="en-US" sz="3000" dirty="0"/>
+              <a:t>business case.</a:t>
+            </a:r>
+            <a:endParaRPr lang="en-US" sz="4000" dirty="0"/>
           </a:p>
         </p:txBody>
       </p:sp>
@@ -7446,7 +7489,7 @@
         </p:nvSpPr>
         <p:spPr>
           <a:xfrm>
-            <a:off x="658368" y="2121408"/>
+            <a:off x="658368" y="2231136"/>
             <a:ext cx="5852160" cy="457200"/>
           </a:xfrm>
           <a:prstGeom prst="rect">
